--- a/slides/week11/ch11_simloop.pptx
+++ b/slides/week11/ch11_simloop.pptx
@@ -27,6 +27,7 @@
     <p:sldId id="275" r:id="rId26"/>
     <p:sldId id="276" r:id="rId27"/>
     <p:sldId id="277" r:id="rId28"/>
+    <p:sldId id="278" r:id="rId29"/>
   </p:sldIdLst>
   <p:notesMasterIdLst>
     <p:notesMasterId r:id="rId15"/>
@@ -592,7 +593,7 @@
           <a:lstStyle/>
           <a:p>
             <a:r>
-              <a:t>실제 엔진도 같은 구조다. 평균 대기 4분이라는 보고를 받으면 어느 대기인지 확인해야 한다. 이 구분이 12장 지표 해석의 기초가 된다.</a:t>
+              <a:t>대기 승객이 거의 0인 시나리오에서 상관계수를 보고하면 숫자는 나오지만 뜻이 없다. 프로젝트 보고서에서 자주 나오는 실수다.</a:t>
             </a:r>
           </a:p>
         </p:txBody>
@@ -662,7 +663,7 @@
           <a:lstStyle/>
           <a:p>
             <a:r>
-              <a:t>1장에서 던진 차량을 절반으로 줄이면 어떻게 되는지가 이 표의 답이다. 승객의 대기시간과 운영자의 차량 비용 중 무엇을 얼마나 중시할지는 사람이 정한다.</a:t>
+              <a:t>실제 엔진도 같은 구조다. 평균 대기 4분이라는 보고를 받으면 어느 대기인지 확인해야 한다. 이 구분이 12장 지표 해석의 기초가 된다.</a:t>
             </a:r>
           </a:p>
         </p:txBody>
@@ -732,7 +733,7 @@
           <a:lstStyle/>
           <a:p>
             <a:r>
-              <a:t>차량을 25대로 줄이면 차이가 다시 드러난다. 어떤 개선이 언제 의미가 있는지 확인하는 사례다.</a:t>
+              <a:t>1장에서 던진 차량을 절반으로 줄이면 어떻게 되는지가 이 표의 답이다. 승객의 대기시간과 운영자의 차량 비용 중 무엇을 얼마나 중시할지는 사람이 정한다.</a:t>
             </a:r>
           </a:p>
         </p:txBody>
@@ -802,7 +803,7 @@
           <a:lstStyle/>
           <a:p>
             <a:r>
-              <a:t>이것으로 시뮬레이터가 완성됐다. 학기 초 그림의 상자가 전부 채워졌다. 다음 주는 기말 프로젝트 발표다.</a:t>
+              <a:t>차량을 25대로 줄이면 차이가 다시 드러난다. 어떤 개선이 언제 의미가 있는지 확인하는 사례다.</a:t>
             </a:r>
           </a:p>
         </p:txBody>
@@ -872,6 +873,76 @@
           <a:lstStyle/>
           <a:p>
             <a:r>
+              <a:t>이것으로 시뮬레이터가 완성됐다. 학기 초 그림의 상자가 전부 채워졌다. 다음 주는 기말 프로젝트 발표다.</a:t>
+            </a:r>
+          </a:p>
+        </p:txBody>
+      </p:sp>
+      <p:sp>
+        <p:nvSpPr>
+          <p:cNvPr id="4" name="Slide Number Placeholder 3"/>
+          <p:cNvSpPr>
+            <a:spLocks noGrp="1"/>
+          </p:cNvSpPr>
+          <p:nvPr>
+            <p:ph type="sldNum" idx="5" sz="quarter"/>
+          </p:nvPr>
+        </p:nvSpPr>
+        <p:spPr/>
+      </p:sp>
+    </p:spTree>
+  </p:cSld>
+  <p:clrMapOvr>
+    <a:masterClrMapping/>
+  </p:clrMapOvr>
+</p:notes>
+</file>
+
+<file path=ppt/notesSlides/notesSlide15.xml><?xml version="1.0" encoding="utf-8"?>
+<p:notes xmlns:a="http://schemas.openxmlformats.org/drawingml/2006/main" xmlns:p="http://schemas.openxmlformats.org/presentationml/2006/main" xmlns:r="http://schemas.openxmlformats.org/officeDocument/2006/relationships">
+  <p:cSld>
+    <p:spTree>
+      <p:nvGrpSpPr>
+        <p:cNvPr id="1" name=""/>
+        <p:cNvGrpSpPr/>
+        <p:nvPr/>
+      </p:nvGrpSpPr>
+      <p:grpSpPr>
+        <a:xfrm>
+          <a:off x="0" y="0"/>
+          <a:ext cx="0" cy="0"/>
+          <a:chOff x="0" y="0"/>
+          <a:chExt cx="0" cy="0"/>
+        </a:xfrm>
+      </p:grpSpPr>
+      <p:sp>
+        <p:nvSpPr>
+          <p:cNvPr id="2" name="Slide Image Placeholder 1"/>
+          <p:cNvSpPr>
+            <a:spLocks noGrp="1"/>
+          </p:cNvSpPr>
+          <p:nvPr>
+            <p:ph type="sldImg" idx="2"/>
+          </p:nvPr>
+        </p:nvSpPr>
+        <p:spPr/>
+      </p:sp>
+      <p:sp>
+        <p:nvSpPr>
+          <p:cNvPr id="3" name="Notes Placeholder 2"/>
+          <p:cNvSpPr>
+            <a:spLocks noGrp="1"/>
+          </p:cNvSpPr>
+          <p:nvPr>
+            <p:ph type="body" idx="3" sz="quarter"/>
+          </p:nvPr>
+        </p:nvSpPr>
+        <p:spPr/>
+        <p:txBody>
+          <a:bodyPr/>
+          <a:lstStyle/>
+          <a:p>
+            <a:r>
               <a:t>연습 11.3은 12장에서 확인한 외곽 대기 문제에 대한 해법이다. 기말 프로젝트에서 노선 변경 시나리오를 맡은 팀원에게 권한다.</a:t>
             </a:r>
           </a:p>
@@ -1082,7 +1153,7 @@
           <a:lstStyle/>
           <a:p>
             <a:r>
-              <a:t>1분이라는 단위는 정한 값이다. 짧게 하면 정밀해지지만 느려지고, 길게 하면 반대다. 택시 배차에서 1분은 사람이 체감하는 단위와 비슷해 적당하다.</a:t>
+              <a:t>슬라이드는 개요만 다룬다. 세부 내용과 코드는 교재 원고와 실습 노트북에서 확인한다. 교재 저장소는 비공개이므로 초대받은 계정으로 로그인한 상태여야 주소가 열린다.</a:t>
             </a:r>
           </a:p>
         </p:txBody>
@@ -1152,7 +1223,7 @@
           <a:lstStyle/>
           <a:p>
             <a:r>
-              <a:t>실제 엔진은 이것을 객체가 아니라 표 여러 개로 관리한다. 승객 1만 명이면 파이썬 객체 1만 개보다 표 하나가 훨씬 빠르다. 읽기는 우리 방식이 쉽고 실행은 그쪽이 빠르다.</a:t>
+              <a:t>1분이라는 단위는 정한 값이다. 짧게 하면 정밀해지지만 느려지고, 길게 하면 반대다. 택시 배차에서 1분은 사람이 체감하는 단위와 비슷해 적당하다.</a:t>
             </a:r>
           </a:p>
         </p:txBody>
@@ -1222,7 +1293,7 @@
           <a:lstStyle/>
           <a:p>
             <a:r>
-              <a:t>기록에 남기는 컬럼 다섯 개는 실제 엔진의 기록 형식과 동일하게 맞췄다. 같은 형식이라야 대조할 수 있다.</a:t>
+              <a:t>실제 엔진은 이것을 객체가 아니라 표 여러 개로 관리한다. 승객 1만 명이면 파이썬 객체 1만 개보다 표 하나가 훨씬 빠르다. 읽기는 우리 방식이 쉽고 실행은 그쪽이 빠르다.</a:t>
             </a:r>
           </a:p>
         </p:txBody>
@@ -1292,7 +1363,7 @@
           <a:lstStyle/>
           <a:p>
             <a:r>
-              <a:t>근사를 쓴 대가를 다음 절에서 엔진과 대조해 확인한다. 연습 11.2에서 9장 예측 모델로 교체해 본다.</a:t>
+              <a:t>기록에 남기는 컬럼 다섯 개는 실제 엔진의 기록 형식과 동일하게 맞췄다. 같은 형식이라야 대조할 수 있다.</a:t>
             </a:r>
           </a:p>
         </p:txBody>
@@ -1362,7 +1433,7 @@
           <a:lstStyle/>
           <a:p>
             <a:r>
-              <a:t>같은 도시, 같은 수요, 같은 차량으로 실행한 결과다. 12장에서 이 대조를 지표 표로 정리한다.</a:t>
+              <a:t>근사를 쓴 대가를 다음 절에서 엔진과 대조해 확인한다. 연습 11.2에서 9장 예측 모델로 교체해 본다.</a:t>
             </a:r>
           </a:p>
         </p:txBody>
@@ -1432,7 +1503,7 @@
           <a:lstStyle/>
           <a:p>
             <a:r>
-              <a:t>대기 승객이 거의 0인 시나리오에서 상관계수를 보고하면 숫자는 나오지만 뜻이 없다. 프로젝트 보고서에서 자주 나오는 실수다.</a:t>
+              <a:t>같은 도시, 같은 수요, 같은 차량으로 실행한 결과다. 12장에서 이 대조를 지표 표로 정리한다.</a:t>
             </a:r>
           </a:p>
         </p:txBody>
@@ -5067,42 +5138,42 @@
       <p:grpSpPr/>
       <p:sp>
         <p:nvSpPr>
-          <p:cNvPr id="2" name="Title 1"/>
-          <p:cNvSpPr>
-            <a:spLocks noGrp="1"/>
-          </p:cNvSpPr>
-          <p:nvPr>
-            <p:ph type="title" idx="100"/>
-          </p:nvPr>
-        </p:nvSpPr>
-        <p:spPr/>
-        <p:txBody>
-          <a:bodyPr/>
-          <a:lstStyle/>
-          <a:p>
-            <a:r>
-              <a:t>3.1 배차 이후의 처리</a:t>
-            </a:r>
-          </a:p>
-        </p:txBody>
-      </p:sp>
-      <p:sp>
-        <p:nvSpPr>
-          <p:cNvPr id="3" name="Text Placeholder 2"/>
-          <p:cNvSpPr>
-            <a:spLocks noGrp="1"/>
-          </p:cNvSpPr>
-          <p:nvPr>
-            <p:ph type="body" idx="101"/>
-          </p:nvPr>
-        </p:nvSpPr>
-        <p:spPr/>
-        <p:txBody>
-          <a:bodyPr/>
-          <a:lstStyle/>
-          <a:p>
-            <a:r>
-              <a:t>3. 교재 11.3–11.4 루프와 실행</a:t>
+          <p:cNvPr id="2" name="Text Placeholder 1"/>
+          <p:cNvSpPr>
+            <a:spLocks noGrp="1"/>
+          </p:cNvSpPr>
+          <p:nvPr>
+            <p:ph type="body" idx="100"/>
+          </p:nvPr>
+        </p:nvSpPr>
+        <p:spPr/>
+        <p:txBody>
+          <a:bodyPr/>
+          <a:lstStyle/>
+          <a:p>
+            <a:r>
+              <a:t>03</a:t>
+            </a:r>
+          </a:p>
+        </p:txBody>
+      </p:sp>
+      <p:sp>
+        <p:nvSpPr>
+          <p:cNvPr id="3" name="Title 2"/>
+          <p:cNvSpPr>
+            <a:spLocks noGrp="1"/>
+          </p:cNvSpPr>
+          <p:nvPr>
+            <p:ph type="title" idx="101"/>
+          </p:nvPr>
+        </p:nvSpPr>
+        <p:spPr/>
+        <p:txBody>
+          <a:bodyPr/>
+          <a:lstStyle/>
+          <a:p>
+            <a:r>
+              <a:t>교재 11.3–11.4 루프와 실행</a:t>
             </a:r>
           </a:p>
         </p:txBody>
@@ -5122,76 +5193,40 @@
           <a:bodyPr/>
           <a:lstStyle/>
           <a:p>
-            <a:pPr/>
-            <a:r>
-              <a:t>차량의 다음 가용 시각 = 하차 시각</a:t>
-            </a:r>
-          </a:p>
-          <a:p>
-            <a:pPr/>
-            <a:r>
-              <a:t>차량 위치 = 승객의 목적지 — 내려준 자리에 정차</a:t>
-            </a:r>
-          </a:p>
-          <a:p>
-            <a:pPr/>
-            <a:r>
-              <a:t>실제 택시 기사는 수요가 많은 곳으로 빈 차를 이동 — 재배치</a:t>
-            </a:r>
-          </a:p>
-          <a:p>
-            <a:pPr/>
-            <a:r>
-              <a:t>이 책에서는 재배치를 다루지 않음, 연습 11.3에서 시도</a:t>
-            </a:r>
-          </a:p>
-        </p:txBody>
-      </p:sp>
-      <p:sp>
-        <p:nvSpPr>
-          <p:cNvPr id="25" name="Slide Number Placeholder 0"/>
-          <p:cNvSpPr>
-            <a:spLocks noGrp="1"/>
-          </p:cNvSpPr>
-          <p:nvPr>
-            <p:ph type="sldNum" sz="quarter" idx="4294967295"/>
-          </p:nvPr>
-        </p:nvSpPr>
-        <p:spPr>
-          <a:xfrm>
-            <a:off x="10591495" y="6355080"/>
-            <a:ext cx="914400" cy="274320"/>
-          </a:xfrm>
-          <a:prstGeom prst="rect">
-            <a:avLst/>
-          </a:prstGeom>
-          <a:extLst>
-            <a:ext uri="{C572A759-6A51-4108-AA02-DFA0A04FC94B}">
-              <ma14:wrappingTextBoxFlag xmlns:ma14="http://schemas.microsoft.com/office/mac/drawingml/2011/main" val="0"/>
-            </a:ext>
-          </a:extLst>
-        </p:spPr>
-        <p:txBody>
-          <a:bodyPr/>
-          <a:lstStyle>
-            <a:lvl1pPr>
-              <a:defRPr sz="1000">
+            <a:pPr>
+              <a:spcAft>
+                <a:spcPts val="1000"/>
+              </a:spcAft>
+            </a:pPr>
+            <a:r>
+              <a:rPr>
                 <a:solidFill>
                   <a:srgbClr val="AFAFAF"/>
                 </a:solidFill>
-                <a:latin typeface="Pretendard Medium"/>
-                <a:ea typeface="Pretendard Medium"/>
-                <a:cs typeface="Pretendard Medium"/>
-              </a:defRPr>
-            </a:lvl1pPr>
-          </a:lstStyle>
-          <a:p>
-            <a:pPr algn="r"/>
-            <a:fld id="{F7021451-1387-4CA6-816F-3879F97B5CBC}" type="slidenum">
-              <a:rPr b="0" lang="en-US"/>
-              <a:t>1004</a:t>
-            </a:fld>
-            <a:endParaRPr lang="en-US"/>
+              </a:rPr>
+              <a:t>3.1  </a:t>
+            </a:r>
+            <a:r>
+              <a:t>배차 이후의 처리</a:t>
+            </a:r>
+          </a:p>
+          <a:p>
+            <a:pPr>
+              <a:spcAft>
+                <a:spcPts val="1000"/>
+              </a:spcAft>
+            </a:pPr>
+            <a:r>
+              <a:rPr>
+                <a:solidFill>
+                  <a:srgbClr val="AFAFAF"/>
+                </a:solidFill>
+              </a:rPr>
+              <a:t>3.2  </a:t>
+            </a:r>
+            <a:r>
+              <a:t>실행 결과</a:t>
+            </a:r>
           </a:p>
         </p:txBody>
       </p:sp>
@@ -5229,7 +5264,7 @@
           <a:lstStyle/>
           <a:p>
             <a:r>
-              <a:t>3.2 실행 결과</a:t>
+              <a:t>3.1 배차 이후의 처리</a:t>
             </a:r>
           </a:p>
         </p:txBody>
@@ -5272,25 +5307,25 @@
           <a:p>
             <a:pPr/>
             <a:r>
-              <a:t>하남 6시간 시뮬레이션 실행 시간 0.4초</a:t>
+              <a:t>차량의 다음 가용 시각 = 하차 시각</a:t>
             </a:r>
           </a:p>
           <a:p>
             <a:pPr/>
             <a:r>
-              <a:t>4장에서 우려한 수 분이 아닌 이유: 소요시간을 직선거리로 근사</a:t>
+              <a:t>차량 위치 = 승객의 목적지 — 내려준 자리에 정차</a:t>
             </a:r>
           </a:p>
           <a:p>
             <a:pPr/>
             <a:r>
-              <a:t>수요 데이터와 차량 데이터를 그대로 입력</a:t>
+              <a:t>실제 택시 기사는 수요가 많은 곳으로 빈 차를 이동 — 재배치</a:t>
             </a:r>
           </a:p>
           <a:p>
             <a:pPr/>
             <a:r>
-              <a:t>결과로 요약 지표와 분 단위 기록을 반환</a:t>
+              <a:t>이 책에서는 재배치를 다루지 않음, 연습 11.3에서 시도</a:t>
             </a:r>
           </a:p>
         </p:txBody>
@@ -5363,42 +5398,42 @@
       <p:grpSpPr/>
       <p:sp>
         <p:nvSpPr>
-          <p:cNvPr id="2" name="Text Placeholder 1"/>
-          <p:cNvSpPr>
-            <a:spLocks noGrp="1"/>
-          </p:cNvSpPr>
-          <p:nvPr>
-            <p:ph type="body" idx="100"/>
-          </p:nvPr>
-        </p:nvSpPr>
-        <p:spPr/>
-        <p:txBody>
-          <a:bodyPr/>
-          <a:lstStyle/>
-          <a:p>
-            <a:r>
-              <a:t>04</a:t>
-            </a:r>
-          </a:p>
-        </p:txBody>
-      </p:sp>
-      <p:sp>
-        <p:nvSpPr>
-          <p:cNvPr id="3" name="Title 2"/>
-          <p:cNvSpPr>
-            <a:spLocks noGrp="1"/>
-          </p:cNvSpPr>
-          <p:nvPr>
-            <p:ph type="title" idx="101"/>
-          </p:nvPr>
-        </p:nvSpPr>
-        <p:spPr/>
-        <p:txBody>
-          <a:bodyPr/>
-          <a:lstStyle/>
-          <a:p>
-            <a:r>
-              <a:t>교재 11.5 엔진 대조</a:t>
+          <p:cNvPr id="2" name="Title 1"/>
+          <p:cNvSpPr>
+            <a:spLocks noGrp="1"/>
+          </p:cNvSpPr>
+          <p:nvPr>
+            <p:ph type="title" idx="100"/>
+          </p:nvPr>
+        </p:nvSpPr>
+        <p:spPr/>
+        <p:txBody>
+          <a:bodyPr/>
+          <a:lstStyle/>
+          <a:p>
+            <a:r>
+              <a:t>3.2 실행 결과</a:t>
+            </a:r>
+          </a:p>
+        </p:txBody>
+      </p:sp>
+      <p:sp>
+        <p:nvSpPr>
+          <p:cNvPr id="3" name="Text Placeholder 2"/>
+          <p:cNvSpPr>
+            <a:spLocks noGrp="1"/>
+          </p:cNvSpPr>
+          <p:nvPr>
+            <p:ph type="body" idx="101"/>
+          </p:nvPr>
+        </p:nvSpPr>
+        <p:spPr/>
+        <p:txBody>
+          <a:bodyPr/>
+          <a:lstStyle/>
+          <a:p>
+            <a:r>
+              <a:t>3. 교재 11.3–11.4 루프와 실행</a:t>
             </a:r>
           </a:p>
         </p:txBody>
@@ -5418,40 +5453,76 @@
           <a:bodyPr/>
           <a:lstStyle/>
           <a:p>
-            <a:pPr>
-              <a:spcAft>
-                <a:spcPts val="1000"/>
-              </a:spcAft>
-            </a:pPr>
-            <a:r>
-              <a:rPr>
+            <a:pPr/>
+            <a:r>
+              <a:t>하남 6시간 시뮬레이션 실행 시간 0.4초</a:t>
+            </a:r>
+          </a:p>
+          <a:p>
+            <a:pPr/>
+            <a:r>
+              <a:t>4장에서 우려한 수 분이 아닌 이유: 소요시간을 직선거리로 근사</a:t>
+            </a:r>
+          </a:p>
+          <a:p>
+            <a:pPr/>
+            <a:r>
+              <a:t>수요 데이터와 차량 데이터를 그대로 입력</a:t>
+            </a:r>
+          </a:p>
+          <a:p>
+            <a:pPr/>
+            <a:r>
+              <a:t>결과로 요약 지표와 분 단위 기록을 반환</a:t>
+            </a:r>
+          </a:p>
+        </p:txBody>
+      </p:sp>
+      <p:sp>
+        <p:nvSpPr>
+          <p:cNvPr id="25" name="Slide Number Placeholder 0"/>
+          <p:cNvSpPr>
+            <a:spLocks noGrp="1"/>
+          </p:cNvSpPr>
+          <p:nvPr>
+            <p:ph type="sldNum" sz="quarter" idx="4294967295"/>
+          </p:nvPr>
+        </p:nvSpPr>
+        <p:spPr>
+          <a:xfrm>
+            <a:off x="10591495" y="6355080"/>
+            <a:ext cx="914400" cy="274320"/>
+          </a:xfrm>
+          <a:prstGeom prst="rect">
+            <a:avLst/>
+          </a:prstGeom>
+          <a:extLst>
+            <a:ext uri="{C572A759-6A51-4108-AA02-DFA0A04FC94B}">
+              <ma14:wrappingTextBoxFlag xmlns:ma14="http://schemas.microsoft.com/office/mac/drawingml/2011/main" val="0"/>
+            </a:ext>
+          </a:extLst>
+        </p:spPr>
+        <p:txBody>
+          <a:bodyPr/>
+          <a:lstStyle>
+            <a:lvl1pPr>
+              <a:defRPr sz="1000">
                 <a:solidFill>
                   <a:srgbClr val="AFAFAF"/>
                 </a:solidFill>
-              </a:rPr>
-              <a:t>4.1  </a:t>
-            </a:r>
-            <a:r>
-              <a:t>지표와 시계열 비교</a:t>
-            </a:r>
-          </a:p>
-          <a:p>
-            <a:pPr>
-              <a:spcAft>
-                <a:spcPts val="1000"/>
-              </a:spcAft>
-            </a:pPr>
-            <a:r>
-              <a:rPr>
-                <a:solidFill>
-                  <a:srgbClr val="AFAFAF"/>
-                </a:solidFill>
-              </a:rPr>
-              <a:t>4.2  </a:t>
-            </a:r>
-            <a:r>
-              <a:t>상관계수를 쓸 수 없는 경우</a:t>
-            </a:r>
+                <a:latin typeface="Pretendard Medium"/>
+                <a:ea typeface="Pretendard Medium"/>
+                <a:cs typeface="Pretendard Medium"/>
+              </a:defRPr>
+            </a:lvl1pPr>
+          </a:lstStyle>
+          <a:p>
+            <a:pPr algn="r"/>
+            <a:fld id="{F7021451-1387-4CA6-816F-3879F97B5CBC}" type="slidenum">
+              <a:rPr b="0" lang="en-US"/>
+              <a:t>1004</a:t>
+            </a:fld>
+            <a:endParaRPr lang="en-US"/>
           </a:p>
         </p:txBody>
       </p:sp>
@@ -5475,42 +5546,42 @@
       <p:grpSpPr/>
       <p:sp>
         <p:nvSpPr>
-          <p:cNvPr id="2" name="Title 1"/>
-          <p:cNvSpPr>
-            <a:spLocks noGrp="1"/>
-          </p:cNvSpPr>
-          <p:nvPr>
-            <p:ph type="title" idx="100"/>
-          </p:nvPr>
-        </p:nvSpPr>
-        <p:spPr/>
-        <p:txBody>
-          <a:bodyPr/>
-          <a:lstStyle/>
-          <a:p>
-            <a:r>
-              <a:t>4.1 지표와 시계열 비교</a:t>
-            </a:r>
-          </a:p>
-        </p:txBody>
-      </p:sp>
-      <p:sp>
-        <p:nvSpPr>
-          <p:cNvPr id="3" name="Text Placeholder 2"/>
-          <p:cNvSpPr>
-            <a:spLocks noGrp="1"/>
-          </p:cNvSpPr>
-          <p:nvPr>
-            <p:ph type="body" idx="101"/>
-          </p:nvPr>
-        </p:nvSpPr>
-        <p:spPr/>
-        <p:txBody>
-          <a:bodyPr/>
-          <a:lstStyle/>
-          <a:p>
-            <a:r>
-              <a:t>4. 교재 11.5 엔진 대조</a:t>
+          <p:cNvPr id="2" name="Text Placeholder 1"/>
+          <p:cNvSpPr>
+            <a:spLocks noGrp="1"/>
+          </p:cNvSpPr>
+          <p:nvPr>
+            <p:ph type="body" idx="100"/>
+          </p:nvPr>
+        </p:nvSpPr>
+        <p:spPr/>
+        <p:txBody>
+          <a:bodyPr/>
+          <a:lstStyle/>
+          <a:p>
+            <a:r>
+              <a:t>04</a:t>
+            </a:r>
+          </a:p>
+        </p:txBody>
+      </p:sp>
+      <p:sp>
+        <p:nvSpPr>
+          <p:cNvPr id="3" name="Title 2"/>
+          <p:cNvSpPr>
+            <a:spLocks noGrp="1"/>
+          </p:cNvSpPr>
+          <p:nvPr>
+            <p:ph type="title" idx="101"/>
+          </p:nvPr>
+        </p:nvSpPr>
+        <p:spPr/>
+        <p:txBody>
+          <a:bodyPr/>
+          <a:lstStyle/>
+          <a:p>
+            <a:r>
+              <a:t>교재 11.5 엔진 대조</a:t>
             </a:r>
           </a:p>
         </p:txBody>
@@ -5530,76 +5601,40 @@
           <a:bodyPr/>
           <a:lstStyle/>
           <a:p>
-            <a:pPr/>
-            <a:r>
-              <a:t>평균 대기시간 — 우리 루프 4.28분, 엔진 4.08분</a:t>
-            </a:r>
-          </a:p>
-          <a:p>
-            <a:pPr/>
-            <a:r>
-              <a:t>차이 0.2분</a:t>
-            </a:r>
-          </a:p>
-          <a:p>
-            <a:pPr/>
-            <a:r>
-              <a:t>운행 중 차량 시계열의 상관계수 0.9 이상</a:t>
-            </a:r>
-          </a:p>
-          <a:p>
-            <a:pPr/>
-            <a:r>
-              <a:t>서로 다른 코드가 같은 답을 내는 것은 좋은 신호</a:t>
-            </a:r>
-          </a:p>
-        </p:txBody>
-      </p:sp>
-      <p:sp>
-        <p:nvSpPr>
-          <p:cNvPr id="25" name="Slide Number Placeholder 0"/>
-          <p:cNvSpPr>
-            <a:spLocks noGrp="1"/>
-          </p:cNvSpPr>
-          <p:nvPr>
-            <p:ph type="sldNum" sz="quarter" idx="4294967295"/>
-          </p:nvPr>
-        </p:nvSpPr>
-        <p:spPr>
-          <a:xfrm>
-            <a:off x="10591495" y="6355080"/>
-            <a:ext cx="914400" cy="274320"/>
-          </a:xfrm>
-          <a:prstGeom prst="rect">
-            <a:avLst/>
-          </a:prstGeom>
-          <a:extLst>
-            <a:ext uri="{C572A759-6A51-4108-AA02-DFA0A04FC94B}">
-              <ma14:wrappingTextBoxFlag xmlns:ma14="http://schemas.microsoft.com/office/mac/drawingml/2011/main" val="0"/>
-            </a:ext>
-          </a:extLst>
-        </p:spPr>
-        <p:txBody>
-          <a:bodyPr/>
-          <a:lstStyle>
-            <a:lvl1pPr>
-              <a:defRPr sz="1000">
+            <a:pPr>
+              <a:spcAft>
+                <a:spcPts val="1000"/>
+              </a:spcAft>
+            </a:pPr>
+            <a:r>
+              <a:rPr>
                 <a:solidFill>
                   <a:srgbClr val="AFAFAF"/>
                 </a:solidFill>
-                <a:latin typeface="Pretendard Medium"/>
-                <a:ea typeface="Pretendard Medium"/>
-                <a:cs typeface="Pretendard Medium"/>
-              </a:defRPr>
-            </a:lvl1pPr>
-          </a:lstStyle>
-          <a:p>
-            <a:pPr algn="r"/>
-            <a:fld id="{F7021451-1387-4CA6-816F-3879F97B5CBC}" type="slidenum">
-              <a:rPr b="0" lang="en-US"/>
-              <a:t>1004</a:t>
-            </a:fld>
-            <a:endParaRPr lang="en-US"/>
+              </a:rPr>
+              <a:t>4.1  </a:t>
+            </a:r>
+            <a:r>
+              <a:t>지표와 시계열 비교</a:t>
+            </a:r>
+          </a:p>
+          <a:p>
+            <a:pPr>
+              <a:spcAft>
+                <a:spcPts val="1000"/>
+              </a:spcAft>
+            </a:pPr>
+            <a:r>
+              <a:rPr>
+                <a:solidFill>
+                  <a:srgbClr val="AFAFAF"/>
+                </a:solidFill>
+              </a:rPr>
+              <a:t>4.2  </a:t>
+            </a:r>
+            <a:r>
+              <a:t>상관계수를 쓸 수 없는 경우</a:t>
+            </a:r>
           </a:p>
         </p:txBody>
       </p:sp>
@@ -5637,7 +5672,7 @@
           <a:lstStyle/>
           <a:p>
             <a:r>
-              <a:t>4.2 상관계수를 쓸 수 없는 경우</a:t>
+              <a:t>4.1 지표와 시계열 비교</a:t>
             </a:r>
           </a:p>
         </p:txBody>
@@ -5680,25 +5715,25 @@
           <a:p>
             <a:pPr/>
             <a:r>
-              <a:t>대기 승객 시계열의 상관계수는 0에 근접</a:t>
+              <a:t>평균 대기시간 — 우리 루프 4.28분, 엔진 4.08분</a:t>
             </a:r>
           </a:p>
           <a:p>
             <a:pPr/>
             <a:r>
-              <a:t>원인: 양쪽 모두 거의 항상 0이라 남은 잡음끼리의 상관</a:t>
+              <a:t>차이 0.2분</a:t>
             </a:r>
           </a:p>
           <a:p>
             <a:pPr/>
             <a:r>
-              <a:t>대안: 0인 비율과 평균으로 분포를 비교</a:t>
+              <a:t>운행 중 차량 시계열의 상관계수 0.9 이상</a:t>
             </a:r>
           </a:p>
           <a:p>
             <a:pPr/>
             <a:r>
-              <a:t>원칙: 그 지표가 무엇을 측정할 수 있는 상태인지 먼저 확인</a:t>
+              <a:t>서로 다른 코드가 같은 답을 내는 것은 좋은 신호</a:t>
             </a:r>
           </a:p>
         </p:txBody>
@@ -5771,42 +5806,42 @@
       <p:grpSpPr/>
       <p:sp>
         <p:nvSpPr>
-          <p:cNvPr id="2" name="Text Placeholder 1"/>
-          <p:cNvSpPr>
-            <a:spLocks noGrp="1"/>
-          </p:cNvSpPr>
-          <p:nvPr>
-            <p:ph type="body" idx="100"/>
-          </p:nvPr>
-        </p:nvSpPr>
-        <p:spPr/>
-        <p:txBody>
-          <a:bodyPr/>
-          <a:lstStyle/>
-          <a:p>
-            <a:r>
-              <a:t>05</a:t>
-            </a:r>
-          </a:p>
-        </p:txBody>
-      </p:sp>
-      <p:sp>
-        <p:nvSpPr>
-          <p:cNvPr id="3" name="Title 2"/>
-          <p:cNvSpPr>
-            <a:spLocks noGrp="1"/>
-          </p:cNvSpPr>
-          <p:nvPr>
-            <p:ph type="title" idx="101"/>
-          </p:nvPr>
-        </p:nvSpPr>
-        <p:spPr/>
-        <p:txBody>
-          <a:bodyPr/>
-          <a:lstStyle/>
-          <a:p>
-            <a:r>
-              <a:t>교재 11.6 대기시간의 두 부분</a:t>
+          <p:cNvPr id="2" name="Title 1"/>
+          <p:cNvSpPr>
+            <a:spLocks noGrp="1"/>
+          </p:cNvSpPr>
+          <p:nvPr>
+            <p:ph type="title" idx="100"/>
+          </p:nvPr>
+        </p:nvSpPr>
+        <p:spPr/>
+        <p:txBody>
+          <a:bodyPr/>
+          <a:lstStyle/>
+          <a:p>
+            <a:r>
+              <a:t>4.2 상관계수를 쓸 수 없는 경우</a:t>
+            </a:r>
+          </a:p>
+        </p:txBody>
+      </p:sp>
+      <p:sp>
+        <p:nvSpPr>
+          <p:cNvPr id="3" name="Text Placeholder 2"/>
+          <p:cNvSpPr>
+            <a:spLocks noGrp="1"/>
+          </p:cNvSpPr>
+          <p:nvPr>
+            <p:ph type="body" idx="101"/>
+          </p:nvPr>
+        </p:nvSpPr>
+        <p:spPr/>
+        <p:txBody>
+          <a:bodyPr/>
+          <a:lstStyle/>
+          <a:p>
+            <a:r>
+              <a:t>4. 교재 11.5 엔진 대조</a:t>
             </a:r>
           </a:p>
         </p:txBody>
@@ -5826,22 +5861,76 @@
           <a:bodyPr/>
           <a:lstStyle/>
           <a:p>
-            <a:pPr>
-              <a:spcAft>
-                <a:spcPts val="1000"/>
-              </a:spcAft>
-            </a:pPr>
-            <a:r>
-              <a:rPr>
+            <a:pPr/>
+            <a:r>
+              <a:t>대기 승객 시계열의 상관계수는 0에 근접</a:t>
+            </a:r>
+          </a:p>
+          <a:p>
+            <a:pPr/>
+            <a:r>
+              <a:t>원인: 양쪽 모두 거의 항상 0이라 남은 잡음끼리의 상관</a:t>
+            </a:r>
+          </a:p>
+          <a:p>
+            <a:pPr/>
+            <a:r>
+              <a:t>대안: 0인 비율과 평균으로 분포를 비교</a:t>
+            </a:r>
+          </a:p>
+          <a:p>
+            <a:pPr/>
+            <a:r>
+              <a:t>원칙: 그 지표가 무엇을 측정할 수 있는 상태인지 먼저 확인</a:t>
+            </a:r>
+          </a:p>
+        </p:txBody>
+      </p:sp>
+      <p:sp>
+        <p:nvSpPr>
+          <p:cNvPr id="25" name="Slide Number Placeholder 0"/>
+          <p:cNvSpPr>
+            <a:spLocks noGrp="1"/>
+          </p:cNvSpPr>
+          <p:nvPr>
+            <p:ph type="sldNum" sz="quarter" idx="4294967295"/>
+          </p:nvPr>
+        </p:nvSpPr>
+        <p:spPr>
+          <a:xfrm>
+            <a:off x="10591495" y="6355080"/>
+            <a:ext cx="914400" cy="274320"/>
+          </a:xfrm>
+          <a:prstGeom prst="rect">
+            <a:avLst/>
+          </a:prstGeom>
+          <a:extLst>
+            <a:ext uri="{C572A759-6A51-4108-AA02-DFA0A04FC94B}">
+              <ma14:wrappingTextBoxFlag xmlns:ma14="http://schemas.microsoft.com/office/mac/drawingml/2011/main" val="0"/>
+            </a:ext>
+          </a:extLst>
+        </p:spPr>
+        <p:txBody>
+          <a:bodyPr/>
+          <a:lstStyle>
+            <a:lvl1pPr>
+              <a:defRPr sz="1000">
                 <a:solidFill>
                   <a:srgbClr val="AFAFAF"/>
                 </a:solidFill>
-              </a:rPr>
-              <a:t>5.1  </a:t>
-            </a:r>
-            <a:r>
-              <a:t>포기 기준 10분인데 최대 26분</a:t>
-            </a:r>
+                <a:latin typeface="Pretendard Medium"/>
+                <a:ea typeface="Pretendard Medium"/>
+                <a:cs typeface="Pretendard Medium"/>
+              </a:defRPr>
+            </a:lvl1pPr>
+          </a:lstStyle>
+          <a:p>
+            <a:pPr algn="r"/>
+            <a:fld id="{F7021451-1387-4CA6-816F-3879F97B5CBC}" type="slidenum">
+              <a:rPr b="0" lang="en-US"/>
+              <a:t>1004</a:t>
+            </a:fld>
+            <a:endParaRPr lang="en-US"/>
           </a:p>
         </p:txBody>
       </p:sp>
@@ -5865,42 +5954,42 @@
       <p:grpSpPr/>
       <p:sp>
         <p:nvSpPr>
-          <p:cNvPr id="2" name="Title 1"/>
-          <p:cNvSpPr>
-            <a:spLocks noGrp="1"/>
-          </p:cNvSpPr>
-          <p:nvPr>
-            <p:ph type="title" idx="100"/>
-          </p:nvPr>
-        </p:nvSpPr>
-        <p:spPr/>
-        <p:txBody>
-          <a:bodyPr/>
-          <a:lstStyle/>
-          <a:p>
-            <a:r>
-              <a:t>5.1 포기 기준 10분인데 최대 26분</a:t>
-            </a:r>
-          </a:p>
-        </p:txBody>
-      </p:sp>
-      <p:sp>
-        <p:nvSpPr>
-          <p:cNvPr id="3" name="Text Placeholder 2"/>
-          <p:cNvSpPr>
-            <a:spLocks noGrp="1"/>
-          </p:cNvSpPr>
-          <p:nvPr>
-            <p:ph type="body" idx="101"/>
-          </p:nvPr>
-        </p:nvSpPr>
-        <p:spPr/>
-        <p:txBody>
-          <a:bodyPr/>
-          <a:lstStyle/>
-          <a:p>
-            <a:r>
-              <a:t>5. 교재 11.6 대기시간의 두 부분</a:t>
+          <p:cNvPr id="2" name="Text Placeholder 1"/>
+          <p:cNvSpPr>
+            <a:spLocks noGrp="1"/>
+          </p:cNvSpPr>
+          <p:nvPr>
+            <p:ph type="body" idx="100"/>
+          </p:nvPr>
+        </p:nvSpPr>
+        <p:spPr/>
+        <p:txBody>
+          <a:bodyPr/>
+          <a:lstStyle/>
+          <a:p>
+            <a:r>
+              <a:t>05</a:t>
+            </a:r>
+          </a:p>
+        </p:txBody>
+      </p:sp>
+      <p:sp>
+        <p:nvSpPr>
+          <p:cNvPr id="3" name="Title 2"/>
+          <p:cNvSpPr>
+            <a:spLocks noGrp="1"/>
+          </p:cNvSpPr>
+          <p:nvPr>
+            <p:ph type="title" idx="101"/>
+          </p:nvPr>
+        </p:nvSpPr>
+        <p:spPr/>
+        <p:txBody>
+          <a:bodyPr/>
+          <a:lstStyle/>
+          <a:p>
+            <a:r>
+              <a:t>교재 11.6 대기시간의 두 부분</a:t>
             </a:r>
           </a:p>
         </p:txBody>
@@ -5920,88 +6009,22 @@
           <a:bodyPr/>
           <a:lstStyle/>
           <a:p>
-            <a:pPr/>
-            <a:r>
-              <a:t>대기시간의 구성</a:t>
-            </a:r>
-          </a:p>
-          <a:p>
-            <a:pPr lvl="1"/>
-            <a:r>
-              <a:t>호출부터 배차 확정까지</a:t>
-            </a:r>
-          </a:p>
-          <a:p>
-            <a:pPr lvl="1"/>
-            <a:r>
-              <a:t>배차 확정부터 차량 도착까지</a:t>
-            </a:r>
-          </a:p>
-          <a:p>
-            <a:pPr/>
-            <a:r>
-              <a:t>포기 기준은 앞부분에만 적용</a:t>
-            </a:r>
-          </a:p>
-          <a:p>
-            <a:pPr/>
-            <a:r>
-              <a:t>배차가 확정된 뒤에는 차량이 멀어도 대기</a:t>
-            </a:r>
-          </a:p>
-          <a:p>
-            <a:pPr/>
-            <a:r>
-              <a:t>결과: 멀리 있는 차량이 배차되면 총 대기가 10분을 크게 초과</a:t>
-            </a:r>
-          </a:p>
-        </p:txBody>
-      </p:sp>
-      <p:sp>
-        <p:nvSpPr>
-          <p:cNvPr id="25" name="Slide Number Placeholder 0"/>
-          <p:cNvSpPr>
-            <a:spLocks noGrp="1"/>
-          </p:cNvSpPr>
-          <p:nvPr>
-            <p:ph type="sldNum" sz="quarter" idx="4294967295"/>
-          </p:nvPr>
-        </p:nvSpPr>
-        <p:spPr>
-          <a:xfrm>
-            <a:off x="10591495" y="6355080"/>
-            <a:ext cx="914400" cy="274320"/>
-          </a:xfrm>
-          <a:prstGeom prst="rect">
-            <a:avLst/>
-          </a:prstGeom>
-          <a:extLst>
-            <a:ext uri="{C572A759-6A51-4108-AA02-DFA0A04FC94B}">
-              <ma14:wrappingTextBoxFlag xmlns:ma14="http://schemas.microsoft.com/office/mac/drawingml/2011/main" val="0"/>
-            </a:ext>
-          </a:extLst>
-        </p:spPr>
-        <p:txBody>
-          <a:bodyPr/>
-          <a:lstStyle>
-            <a:lvl1pPr>
-              <a:defRPr sz="1000">
+            <a:pPr>
+              <a:spcAft>
+                <a:spcPts val="1000"/>
+              </a:spcAft>
+            </a:pPr>
+            <a:r>
+              <a:rPr>
                 <a:solidFill>
                   <a:srgbClr val="AFAFAF"/>
                 </a:solidFill>
-                <a:latin typeface="Pretendard Medium"/>
-                <a:ea typeface="Pretendard Medium"/>
-                <a:cs typeface="Pretendard Medium"/>
-              </a:defRPr>
-            </a:lvl1pPr>
-          </a:lstStyle>
-          <a:p>
-            <a:pPr algn="r"/>
-            <a:fld id="{F7021451-1387-4CA6-816F-3879F97B5CBC}" type="slidenum">
-              <a:rPr b="0" lang="en-US"/>
-              <a:t>1004</a:t>
-            </a:fld>
-            <a:endParaRPr lang="en-US"/>
+              </a:rPr>
+              <a:t>5.1  </a:t>
+            </a:r>
+            <a:r>
+              <a:t>포기 기준 10분인데 최대 26분</a:t>
+            </a:r>
           </a:p>
         </p:txBody>
       </p:sp>
@@ -6025,42 +6048,42 @@
       <p:grpSpPr/>
       <p:sp>
         <p:nvSpPr>
-          <p:cNvPr id="2" name="Text Placeholder 1"/>
-          <p:cNvSpPr>
-            <a:spLocks noGrp="1"/>
-          </p:cNvSpPr>
-          <p:nvPr>
-            <p:ph type="body" idx="100"/>
-          </p:nvPr>
-        </p:nvSpPr>
-        <p:spPr/>
-        <p:txBody>
-          <a:bodyPr/>
-          <a:lstStyle/>
-          <a:p>
-            <a:r>
-              <a:t>06</a:t>
-            </a:r>
-          </a:p>
-        </p:txBody>
-      </p:sp>
-      <p:sp>
-        <p:nvSpPr>
-          <p:cNvPr id="3" name="Title 2"/>
-          <p:cNvSpPr>
-            <a:spLocks noGrp="1"/>
-          </p:cNvSpPr>
-          <p:nvPr>
-            <p:ph type="title" idx="101"/>
-          </p:nvPr>
-        </p:nvSpPr>
-        <p:spPr/>
-        <p:txBody>
-          <a:bodyPr/>
-          <a:lstStyle/>
-          <a:p>
-            <a:r>
-              <a:t>교재 11.7–11.8 조건 변경과 정리</a:t>
+          <p:cNvPr id="2" name="Title 1"/>
+          <p:cNvSpPr>
+            <a:spLocks noGrp="1"/>
+          </p:cNvSpPr>
+          <p:nvPr>
+            <p:ph type="title" idx="100"/>
+          </p:nvPr>
+        </p:nvSpPr>
+        <p:spPr/>
+        <p:txBody>
+          <a:bodyPr/>
+          <a:lstStyle/>
+          <a:p>
+            <a:r>
+              <a:t>5.1 포기 기준 10분인데 최대 26분</a:t>
+            </a:r>
+          </a:p>
+        </p:txBody>
+      </p:sp>
+      <p:sp>
+        <p:nvSpPr>
+          <p:cNvPr id="3" name="Text Placeholder 2"/>
+          <p:cNvSpPr>
+            <a:spLocks noGrp="1"/>
+          </p:cNvSpPr>
+          <p:nvPr>
+            <p:ph type="body" idx="101"/>
+          </p:nvPr>
+        </p:nvSpPr>
+        <p:spPr/>
+        <p:txBody>
+          <a:bodyPr/>
+          <a:lstStyle/>
+          <a:p>
+            <a:r>
+              <a:t>5. 교재 11.6 대기시간의 두 부분</a:t>
             </a:r>
           </a:p>
         </p:txBody>
@@ -6080,76 +6103,88 @@
           <a:bodyPr/>
           <a:lstStyle/>
           <a:p>
-            <a:pPr>
-              <a:spcAft>
-                <a:spcPts val="1000"/>
-              </a:spcAft>
-            </a:pPr>
-            <a:r>
-              <a:rPr>
+            <a:pPr/>
+            <a:r>
+              <a:t>대기시간의 구성</a:t>
+            </a:r>
+          </a:p>
+          <a:p>
+            <a:pPr lvl="1"/>
+            <a:r>
+              <a:t>호출부터 배차 확정까지</a:t>
+            </a:r>
+          </a:p>
+          <a:p>
+            <a:pPr lvl="1"/>
+            <a:r>
+              <a:t>배차 확정부터 차량 도착까지</a:t>
+            </a:r>
+          </a:p>
+          <a:p>
+            <a:pPr/>
+            <a:r>
+              <a:t>포기 기준은 앞부분에만 적용</a:t>
+            </a:r>
+          </a:p>
+          <a:p>
+            <a:pPr/>
+            <a:r>
+              <a:t>배차가 확정된 뒤에는 차량이 멀어도 대기</a:t>
+            </a:r>
+          </a:p>
+          <a:p>
+            <a:pPr/>
+            <a:r>
+              <a:t>결과: 멀리 있는 차량이 배차되면 총 대기가 10분을 크게 초과</a:t>
+            </a:r>
+          </a:p>
+        </p:txBody>
+      </p:sp>
+      <p:sp>
+        <p:nvSpPr>
+          <p:cNvPr id="25" name="Slide Number Placeholder 0"/>
+          <p:cNvSpPr>
+            <a:spLocks noGrp="1"/>
+          </p:cNvSpPr>
+          <p:nvPr>
+            <p:ph type="sldNum" sz="quarter" idx="4294967295"/>
+          </p:nvPr>
+        </p:nvSpPr>
+        <p:spPr>
+          <a:xfrm>
+            <a:off x="10591495" y="6355080"/>
+            <a:ext cx="914400" cy="274320"/>
+          </a:xfrm>
+          <a:prstGeom prst="rect">
+            <a:avLst/>
+          </a:prstGeom>
+          <a:extLst>
+            <a:ext uri="{C572A759-6A51-4108-AA02-DFA0A04FC94B}">
+              <ma14:wrappingTextBoxFlag xmlns:ma14="http://schemas.microsoft.com/office/mac/drawingml/2011/main" val="0"/>
+            </a:ext>
+          </a:extLst>
+        </p:spPr>
+        <p:txBody>
+          <a:bodyPr/>
+          <a:lstStyle>
+            <a:lvl1pPr>
+              <a:defRPr sz="1000">
                 <a:solidFill>
                   <a:srgbClr val="AFAFAF"/>
                 </a:solidFill>
-              </a:rPr>
-              <a:t>6.1  </a:t>
-            </a:r>
-            <a:r>
-              <a:t>1장 질문에 대한 답</a:t>
-            </a:r>
-          </a:p>
-          <a:p>
-            <a:pPr>
-              <a:spcAft>
-                <a:spcPts val="1000"/>
-              </a:spcAft>
-            </a:pPr>
-            <a:r>
-              <a:rPr>
-                <a:solidFill>
-                  <a:srgbClr val="AFAFAF"/>
-                </a:solidFill>
-              </a:rPr>
-              <a:t>6.2  </a:t>
-            </a:r>
-            <a:r>
-              <a:t>배차 방법의 효과</a:t>
-            </a:r>
-          </a:p>
-          <a:p>
-            <a:pPr>
-              <a:spcAft>
-                <a:spcPts val="1000"/>
-              </a:spcAft>
-            </a:pPr>
-            <a:r>
-              <a:rPr>
-                <a:solidFill>
-                  <a:srgbClr val="AFAFAF"/>
-                </a:solidFill>
-              </a:rPr>
-              <a:t>6.3  </a:t>
-            </a:r>
-            <a:r>
-              <a:t>오늘의 정리</a:t>
-            </a:r>
-          </a:p>
-          <a:p>
-            <a:pPr>
-              <a:spcAft>
-                <a:spcPts val="1000"/>
-              </a:spcAft>
-            </a:pPr>
-            <a:r>
-              <a:rPr>
-                <a:solidFill>
-                  <a:srgbClr val="AFAFAF"/>
-                </a:solidFill>
-              </a:rPr>
-              <a:t>6.4  </a:t>
-            </a:r>
-            <a:r>
-              <a:t>연습과 다음 주</a:t>
-            </a:r>
+                <a:latin typeface="Pretendard Medium"/>
+                <a:ea typeface="Pretendard Medium"/>
+                <a:cs typeface="Pretendard Medium"/>
+              </a:defRPr>
+            </a:lvl1pPr>
+          </a:lstStyle>
+          <a:p>
+            <a:pPr algn="r"/>
+            <a:fld id="{F7021451-1387-4CA6-816F-3879F97B5CBC}" type="slidenum">
+              <a:rPr b="0" lang="en-US"/>
+              <a:t>1004</a:t>
+            </a:fld>
+            <a:endParaRPr lang="en-US"/>
           </a:p>
         </p:txBody>
       </p:sp>
@@ -6162,6 +6197,154 @@
 </file>
 
 <file path=ppt/slides/slide18.xml><?xml version="1.0" encoding="utf-8"?>
+<p:sld xmlns:a="http://schemas.openxmlformats.org/drawingml/2006/main" xmlns:p="http://schemas.openxmlformats.org/presentationml/2006/main" xmlns:r="http://schemas.openxmlformats.org/officeDocument/2006/relationships">
+  <p:cSld>
+    <p:spTree>
+      <p:nvGrpSpPr>
+        <p:cNvPr id="1" name=""/>
+        <p:cNvGrpSpPr/>
+        <p:nvPr/>
+      </p:nvGrpSpPr>
+      <p:grpSpPr/>
+      <p:sp>
+        <p:nvSpPr>
+          <p:cNvPr id="2" name="Text Placeholder 1"/>
+          <p:cNvSpPr>
+            <a:spLocks noGrp="1"/>
+          </p:cNvSpPr>
+          <p:nvPr>
+            <p:ph type="body" idx="100"/>
+          </p:nvPr>
+        </p:nvSpPr>
+        <p:spPr/>
+        <p:txBody>
+          <a:bodyPr/>
+          <a:lstStyle/>
+          <a:p>
+            <a:r>
+              <a:t>06</a:t>
+            </a:r>
+          </a:p>
+        </p:txBody>
+      </p:sp>
+      <p:sp>
+        <p:nvSpPr>
+          <p:cNvPr id="3" name="Title 2"/>
+          <p:cNvSpPr>
+            <a:spLocks noGrp="1"/>
+          </p:cNvSpPr>
+          <p:nvPr>
+            <p:ph type="title" idx="101"/>
+          </p:nvPr>
+        </p:nvSpPr>
+        <p:spPr/>
+        <p:txBody>
+          <a:bodyPr/>
+          <a:lstStyle/>
+          <a:p>
+            <a:r>
+              <a:t>교재 11.7–11.8 조건 변경과 정리</a:t>
+            </a:r>
+          </a:p>
+        </p:txBody>
+      </p:sp>
+      <p:sp>
+        <p:nvSpPr>
+          <p:cNvPr id="4" name="Text Placeholder 3"/>
+          <p:cNvSpPr>
+            <a:spLocks noGrp="1"/>
+          </p:cNvSpPr>
+          <p:nvPr>
+            <p:ph type="body" idx="102"/>
+          </p:nvPr>
+        </p:nvSpPr>
+        <p:spPr/>
+        <p:txBody>
+          <a:bodyPr/>
+          <a:lstStyle/>
+          <a:p>
+            <a:pPr>
+              <a:spcAft>
+                <a:spcPts val="1000"/>
+              </a:spcAft>
+            </a:pPr>
+            <a:r>
+              <a:rPr>
+                <a:solidFill>
+                  <a:srgbClr val="AFAFAF"/>
+                </a:solidFill>
+              </a:rPr>
+              <a:t>6.1  </a:t>
+            </a:r>
+            <a:r>
+              <a:t>1장 질문에 대한 답</a:t>
+            </a:r>
+          </a:p>
+          <a:p>
+            <a:pPr>
+              <a:spcAft>
+                <a:spcPts val="1000"/>
+              </a:spcAft>
+            </a:pPr>
+            <a:r>
+              <a:rPr>
+                <a:solidFill>
+                  <a:srgbClr val="AFAFAF"/>
+                </a:solidFill>
+              </a:rPr>
+              <a:t>6.2  </a:t>
+            </a:r>
+            <a:r>
+              <a:t>배차 방법의 효과</a:t>
+            </a:r>
+          </a:p>
+          <a:p>
+            <a:pPr>
+              <a:spcAft>
+                <a:spcPts val="1000"/>
+              </a:spcAft>
+            </a:pPr>
+            <a:r>
+              <a:rPr>
+                <a:solidFill>
+                  <a:srgbClr val="AFAFAF"/>
+                </a:solidFill>
+              </a:rPr>
+              <a:t>6.3  </a:t>
+            </a:r>
+            <a:r>
+              <a:t>오늘의 정리</a:t>
+            </a:r>
+          </a:p>
+          <a:p>
+            <a:pPr>
+              <a:spcAft>
+                <a:spcPts val="1000"/>
+              </a:spcAft>
+            </a:pPr>
+            <a:r>
+              <a:rPr>
+                <a:solidFill>
+                  <a:srgbClr val="AFAFAF"/>
+                </a:solidFill>
+              </a:rPr>
+              <a:t>6.4  </a:t>
+            </a:r>
+            <a:r>
+              <a:t>연습과 다음 주</a:t>
+            </a:r>
+          </a:p>
+        </p:txBody>
+      </p:sp>
+    </p:spTree>
+  </p:cSld>
+  <p:clrMapOvr>
+    <a:masterClrMapping/>
+  </p:clrMapOvr>
+</p:sld>
+</file>
+
+<file path=ppt/slides/slide19.xml><?xml version="1.0" encoding="utf-8"?>
 <p:sld xmlns:a="http://schemas.openxmlformats.org/drawingml/2006/main" xmlns:p="http://schemas.openxmlformats.org/presentationml/2006/main" xmlns:r="http://schemas.openxmlformats.org/officeDocument/2006/relationships">
   <p:cSld>
     <p:spTree>
@@ -6346,154 +6529,6 @@
           </a:prstGeom>
         </p:spPr>
       </p:pic>
-    </p:spTree>
-  </p:cSld>
-  <p:clrMapOvr>
-    <a:masterClrMapping/>
-  </p:clrMapOvr>
-</p:sld>
-</file>
-
-<file path=ppt/slides/slide19.xml><?xml version="1.0" encoding="utf-8"?>
-<p:sld xmlns:a="http://schemas.openxmlformats.org/drawingml/2006/main" xmlns:p="http://schemas.openxmlformats.org/presentationml/2006/main" xmlns:r="http://schemas.openxmlformats.org/officeDocument/2006/relationships">
-  <p:cSld>
-    <p:spTree>
-      <p:nvGrpSpPr>
-        <p:cNvPr id="1" name=""/>
-        <p:cNvGrpSpPr/>
-        <p:nvPr/>
-      </p:nvGrpSpPr>
-      <p:grpSpPr/>
-      <p:sp>
-        <p:nvSpPr>
-          <p:cNvPr id="2" name="Title 1"/>
-          <p:cNvSpPr>
-            <a:spLocks noGrp="1"/>
-          </p:cNvSpPr>
-          <p:nvPr>
-            <p:ph type="title" idx="100"/>
-          </p:nvPr>
-        </p:nvSpPr>
-        <p:spPr/>
-        <p:txBody>
-          <a:bodyPr/>
-          <a:lstStyle/>
-          <a:p>
-            <a:r>
-              <a:t>6.2 배차 방법의 효과</a:t>
-            </a:r>
-          </a:p>
-        </p:txBody>
-      </p:sp>
-      <p:sp>
-        <p:nvSpPr>
-          <p:cNvPr id="3" name="Text Placeholder 2"/>
-          <p:cNvSpPr>
-            <a:spLocks noGrp="1"/>
-          </p:cNvSpPr>
-          <p:nvPr>
-            <p:ph type="body" idx="101"/>
-          </p:nvPr>
-        </p:nvSpPr>
-        <p:spPr/>
-        <p:txBody>
-          <a:bodyPr/>
-          <a:lstStyle/>
-          <a:p>
-            <a:r>
-              <a:t>6. 교재 11.7–11.8 조건 변경과 정리</a:t>
-            </a:r>
-          </a:p>
-        </p:txBody>
-      </p:sp>
-      <p:sp>
-        <p:nvSpPr>
-          <p:cNvPr id="4" name="Text Placeholder 3"/>
-          <p:cNvSpPr>
-            <a:spLocks noGrp="1"/>
-          </p:cNvSpPr>
-          <p:nvPr>
-            <p:ph type="body" idx="102"/>
-          </p:nvPr>
-        </p:nvSpPr>
-        <p:spPr/>
-        <p:txBody>
-          <a:bodyPr/>
-          <a:lstStyle/>
-          <a:p>
-            <a:pPr/>
-            <a:r>
-              <a:t>10장 실험에서 헝가리안이 탐욕보다 14% 우수</a:t>
-            </a:r>
-          </a:p>
-          <a:p>
-            <a:pPr/>
-            <a:r>
-              <a:t>전체 시뮬레이션에서는 차이가 1% 남짓</a:t>
-            </a:r>
-          </a:p>
-          <a:p>
-            <a:pPr/>
-            <a:r>
-              <a:t>원인: 대부분의 분에 대기 승객이 0명에서 1명</a:t>
-            </a:r>
-          </a:p>
-          <a:p>
-            <a:pPr/>
-            <a:r>
-              <a:t>결론: 배차 알고리즘은 수요가 공급을 압박할 때만 효과</a:t>
-            </a:r>
-          </a:p>
-        </p:txBody>
-      </p:sp>
-      <p:sp>
-        <p:nvSpPr>
-          <p:cNvPr id="25" name="Slide Number Placeholder 0"/>
-          <p:cNvSpPr>
-            <a:spLocks noGrp="1"/>
-          </p:cNvSpPr>
-          <p:nvPr>
-            <p:ph type="sldNum" sz="quarter" idx="4294967295"/>
-          </p:nvPr>
-        </p:nvSpPr>
-        <p:spPr>
-          <a:xfrm>
-            <a:off x="10591495" y="6355080"/>
-            <a:ext cx="914400" cy="274320"/>
-          </a:xfrm>
-          <a:prstGeom prst="rect">
-            <a:avLst/>
-          </a:prstGeom>
-          <a:extLst>
-            <a:ext uri="{C572A759-6A51-4108-AA02-DFA0A04FC94B}">
-              <ma14:wrappingTextBoxFlag xmlns:ma14="http://schemas.microsoft.com/office/mac/drawingml/2011/main" val="0"/>
-            </a:ext>
-          </a:extLst>
-        </p:spPr>
-        <p:txBody>
-          <a:bodyPr/>
-          <a:lstStyle>
-            <a:lvl1pPr>
-              <a:defRPr sz="1000">
-                <a:solidFill>
-                  <a:srgbClr val="AFAFAF"/>
-                </a:solidFill>
-                <a:latin typeface="Pretendard Medium"/>
-                <a:ea typeface="Pretendard Medium"/>
-                <a:cs typeface="Pretendard Medium"/>
-              </a:defRPr>
-            </a:lvl1pPr>
-          </a:lstStyle>
-          <a:p>
-            <a:pPr algn="r"/>
-            <a:fld id="{F7021451-1387-4CA6-816F-3879F97B5CBC}" type="slidenum">
-              <a:rPr b="0" lang="en-US"/>
-              <a:t>1004</a:t>
-            </a:fld>
-            <a:endParaRPr lang="en-US"/>
-          </a:p>
-        </p:txBody>
-      </p:sp>
     </p:spTree>
   </p:cSld>
   <p:clrMapOvr>
@@ -6662,7 +6697,7 @@
                           </a:solidFill>
                           <a:latin typeface="Pretendard Medium"/>
                         </a:rPr>
-                        <a:t>1.1 재료가 다 모였습니다  ·  1.2 학습 목표</a:t>
+                        <a:t>1.1 재료가 다 모였습니다  ·  1.2 학습 목표  ·  1.3 교재와 실습을 여는 곳</a:t>
                       </a:r>
                     </a:p>
                   </a:txBody>
@@ -7323,7 +7358,7 @@
           <a:lstStyle/>
           <a:p>
             <a:r>
-              <a:t>6.3 오늘의 정리</a:t>
+              <a:t>6.2 배차 방법의 효과</a:t>
             </a:r>
           </a:p>
         </p:txBody>
@@ -7366,25 +7401,25 @@
           <a:p>
             <a:pPr/>
             <a:r>
-              <a:t>한 스텝은 다섯 단계 — 접수, 포기, 배차, 상태 갱신, 기록</a:t>
+              <a:t>10장 실험에서 헝가리안이 탐욕보다 14% 우수</a:t>
             </a:r>
           </a:p>
           <a:p>
             <a:pPr/>
             <a:r>
-              <a:t>차량 상태는 위치와 가용 시각 두 값이면 충분</a:t>
+              <a:t>전체 시뮬레이션에서는 차이가 1% 남짓</a:t>
             </a:r>
           </a:p>
           <a:p>
             <a:pPr/>
             <a:r>
-              <a:t>우리 루프 4.28분, 엔진 4.08분, 운행 차량 시계열 상관 0.9 이상</a:t>
+              <a:t>원인: 대부분의 분에 대기 승객이 0명에서 1명</a:t>
             </a:r>
           </a:p>
           <a:p>
             <a:pPr/>
             <a:r>
-              <a:t>대기시간은 배차까지와 차량 도착까지로 분리 — 포기 기준은 앞부분에만 적용</a:t>
+              <a:t>결론: 배차 알고리즘은 수요가 공급을 압박할 때만 효과</a:t>
             </a:r>
           </a:p>
         </p:txBody>
@@ -7471,7 +7506,7 @@
           <a:lstStyle/>
           <a:p>
             <a:r>
-              <a:t>6.4 연습과 다음 주</a:t>
+              <a:t>6.3 오늘의 정리</a:t>
             </a:r>
           </a:p>
         </p:txBody>
@@ -7514,37 +7549,25 @@
           <a:p>
             <a:pPr/>
             <a:r>
-              <a:t>연습 11.1 ★ — 포기 기준을 3, 5, 10, 20분으로 변경했을 때의 지표</a:t>
-            </a:r>
-          </a:p>
-          <a:p>
-            <a:pPr lvl="1"/>
-            <a:r>
-              <a:t>산출물: 기준별 지표 표, 적정 값과 근거 3줄</a:t>
+              <a:t>한 스텝은 다섯 단계 — 접수, 포기, 배차, 상태 갱신, 기록</a:t>
             </a:r>
           </a:p>
           <a:p>
             <a:pPr/>
             <a:r>
-              <a:t>연습 11.2 ★★ — 소요시간 계산을 9장 예측 모델로 교체</a:t>
-            </a:r>
-          </a:p>
-          <a:p>
-            <a:pPr lvl="1"/>
-            <a:r>
-              <a:t>산출물: 두 방식의 비교표, 배치 예측의 속도 개선폭</a:t>
+              <a:t>차량 상태는 위치와 가용 시각 두 값이면 충분</a:t>
             </a:r>
           </a:p>
           <a:p>
             <a:pPr/>
             <a:r>
-              <a:t>연습 11.3 ★★★ — 차량 재배치 구현과 공차 거리의 대가 판단</a:t>
+              <a:t>우리 루프 4.28분, 엔진 4.08분, 운행 차량 시계열 상관 0.9 이상</a:t>
             </a:r>
           </a:p>
           <a:p>
             <a:pPr/>
             <a:r>
-              <a:t>다음 주: 12주차 기말 프로젝트 발표와 종강</a:t>
+              <a:t>대기시간은 배차까지와 차량 도착까지로 분리 — 포기 기준은 앞부분에만 적용</a:t>
             </a:r>
           </a:p>
         </p:txBody>
@@ -7631,6 +7654,166 @@
           <a:lstStyle/>
           <a:p>
             <a:r>
+              <a:t>6.4 연습과 다음 주</a:t>
+            </a:r>
+          </a:p>
+        </p:txBody>
+      </p:sp>
+      <p:sp>
+        <p:nvSpPr>
+          <p:cNvPr id="3" name="Text Placeholder 2"/>
+          <p:cNvSpPr>
+            <a:spLocks noGrp="1"/>
+          </p:cNvSpPr>
+          <p:nvPr>
+            <p:ph type="body" idx="101"/>
+          </p:nvPr>
+        </p:nvSpPr>
+        <p:spPr/>
+        <p:txBody>
+          <a:bodyPr/>
+          <a:lstStyle/>
+          <a:p>
+            <a:r>
+              <a:t>6. 교재 11.7–11.8 조건 변경과 정리</a:t>
+            </a:r>
+          </a:p>
+        </p:txBody>
+      </p:sp>
+      <p:sp>
+        <p:nvSpPr>
+          <p:cNvPr id="4" name="Text Placeholder 3"/>
+          <p:cNvSpPr>
+            <a:spLocks noGrp="1"/>
+          </p:cNvSpPr>
+          <p:nvPr>
+            <p:ph type="body" idx="102"/>
+          </p:nvPr>
+        </p:nvSpPr>
+        <p:spPr/>
+        <p:txBody>
+          <a:bodyPr/>
+          <a:lstStyle/>
+          <a:p>
+            <a:pPr/>
+            <a:r>
+              <a:t>연습 11.1 ★ — 포기 기준을 3, 5, 10, 20분으로 변경했을 때의 지표</a:t>
+            </a:r>
+          </a:p>
+          <a:p>
+            <a:pPr lvl="1"/>
+            <a:r>
+              <a:t>산출물: 기준별 지표 표, 적정 값과 근거 3줄</a:t>
+            </a:r>
+          </a:p>
+          <a:p>
+            <a:pPr/>
+            <a:r>
+              <a:t>연습 11.2 ★★ — 소요시간 계산을 9장 예측 모델로 교체</a:t>
+            </a:r>
+          </a:p>
+          <a:p>
+            <a:pPr lvl="1"/>
+            <a:r>
+              <a:t>산출물: 두 방식의 비교표, 배치 예측의 속도 개선폭</a:t>
+            </a:r>
+          </a:p>
+          <a:p>
+            <a:pPr/>
+            <a:r>
+              <a:t>연습 11.3 ★★★ — 차량 재배치 구현과 공차 거리의 대가 판단</a:t>
+            </a:r>
+          </a:p>
+          <a:p>
+            <a:pPr/>
+            <a:r>
+              <a:t>다음 주: 12주차 기말 프로젝트 발표와 종강</a:t>
+            </a:r>
+          </a:p>
+        </p:txBody>
+      </p:sp>
+      <p:sp>
+        <p:nvSpPr>
+          <p:cNvPr id="25" name="Slide Number Placeholder 0"/>
+          <p:cNvSpPr>
+            <a:spLocks noGrp="1"/>
+          </p:cNvSpPr>
+          <p:nvPr>
+            <p:ph type="sldNum" sz="quarter" idx="4294967295"/>
+          </p:nvPr>
+        </p:nvSpPr>
+        <p:spPr>
+          <a:xfrm>
+            <a:off x="10591495" y="6355080"/>
+            <a:ext cx="914400" cy="274320"/>
+          </a:xfrm>
+          <a:prstGeom prst="rect">
+            <a:avLst/>
+          </a:prstGeom>
+          <a:extLst>
+            <a:ext uri="{C572A759-6A51-4108-AA02-DFA0A04FC94B}">
+              <ma14:wrappingTextBoxFlag xmlns:ma14="http://schemas.microsoft.com/office/mac/drawingml/2011/main" val="0"/>
+            </a:ext>
+          </a:extLst>
+        </p:spPr>
+        <p:txBody>
+          <a:bodyPr/>
+          <a:lstStyle>
+            <a:lvl1pPr>
+              <a:defRPr sz="1000">
+                <a:solidFill>
+                  <a:srgbClr val="AFAFAF"/>
+                </a:solidFill>
+                <a:latin typeface="Pretendard Medium"/>
+                <a:ea typeface="Pretendard Medium"/>
+                <a:cs typeface="Pretendard Medium"/>
+              </a:defRPr>
+            </a:lvl1pPr>
+          </a:lstStyle>
+          <a:p>
+            <a:pPr algn="r"/>
+            <a:fld id="{F7021451-1387-4CA6-816F-3879F97B5CBC}" type="slidenum">
+              <a:rPr b="0" lang="en-US"/>
+              <a:t>1004</a:t>
+            </a:fld>
+            <a:endParaRPr lang="en-US"/>
+          </a:p>
+        </p:txBody>
+      </p:sp>
+    </p:spTree>
+  </p:cSld>
+  <p:clrMapOvr>
+    <a:masterClrMapping/>
+  </p:clrMapOvr>
+</p:sld>
+</file>
+
+<file path=ppt/slides/slide23.xml><?xml version="1.0" encoding="utf-8"?>
+<p:sld xmlns:a="http://schemas.openxmlformats.org/drawingml/2006/main" xmlns:p="http://schemas.openxmlformats.org/presentationml/2006/main" xmlns:r="http://schemas.openxmlformats.org/officeDocument/2006/relationships">
+  <p:cSld>
+    <p:spTree>
+      <p:nvGrpSpPr>
+        <p:cNvPr id="1" name=""/>
+        <p:cNvGrpSpPr/>
+        <p:nvPr/>
+      </p:nvGrpSpPr>
+      <p:grpSpPr/>
+      <p:sp>
+        <p:nvSpPr>
+          <p:cNvPr id="2" name="Title 1"/>
+          <p:cNvSpPr>
+            <a:spLocks noGrp="1"/>
+          </p:cNvSpPr>
+          <p:nvPr>
+            <p:ph type="title" idx="100"/>
+          </p:nvPr>
+        </p:nvSpPr>
+        <p:spPr/>
+        <p:txBody>
+          <a:bodyPr/>
+          <a:lstStyle/>
+          <a:p>
+            <a:r>
               <a:t>다음 주에 봅니다</a:t>
             </a:r>
           </a:p>
@@ -7788,6 +7971,24 @@
               <a:t>학습 목표</a:t>
             </a:r>
           </a:p>
+          <a:p>
+            <a:pPr>
+              <a:spcAft>
+                <a:spcPts val="1000"/>
+              </a:spcAft>
+            </a:pPr>
+            <a:r>
+              <a:rPr>
+                <a:solidFill>
+                  <a:srgbClr val="AFAFAF"/>
+                </a:solidFill>
+              </a:rPr>
+              <a:t>1.3  </a:t>
+            </a:r>
+            <a:r>
+              <a:t>교재와 실습을 여는 곳</a:t>
+            </a:r>
+          </a:p>
         </p:txBody>
       </p:sp>
     </p:spTree>
@@ -8106,42 +8307,42 @@
       <p:grpSpPr/>
       <p:sp>
         <p:nvSpPr>
-          <p:cNvPr id="2" name="Text Placeholder 1"/>
-          <p:cNvSpPr>
-            <a:spLocks noGrp="1"/>
-          </p:cNvSpPr>
-          <p:nvPr>
-            <p:ph type="body" idx="100"/>
-          </p:nvPr>
-        </p:nvSpPr>
-        <p:spPr/>
-        <p:txBody>
-          <a:bodyPr/>
-          <a:lstStyle/>
-          <a:p>
-            <a:r>
-              <a:t>02</a:t>
-            </a:r>
-          </a:p>
-        </p:txBody>
-      </p:sp>
-      <p:sp>
-        <p:nvSpPr>
-          <p:cNvPr id="3" name="Title 2"/>
-          <p:cNvSpPr>
-            <a:spLocks noGrp="1"/>
-          </p:cNvSpPr>
-          <p:nvPr>
-            <p:ph type="title" idx="101"/>
-          </p:nvPr>
-        </p:nvSpPr>
-        <p:spPr/>
-        <p:txBody>
-          <a:bodyPr/>
-          <a:lstStyle/>
-          <a:p>
-            <a:r>
-              <a:t>교재 11.1–11.2 스텝과 상태</a:t>
+          <p:cNvPr id="2" name="Title 1"/>
+          <p:cNvSpPr>
+            <a:spLocks noGrp="1"/>
+          </p:cNvSpPr>
+          <p:nvPr>
+            <p:ph type="title" idx="100"/>
+          </p:nvPr>
+        </p:nvSpPr>
+        <p:spPr/>
+        <p:txBody>
+          <a:bodyPr/>
+          <a:lstStyle/>
+          <a:p>
+            <a:r>
+              <a:t>1.3 교재와 실습을 여는 곳</a:t>
+            </a:r>
+          </a:p>
+        </p:txBody>
+      </p:sp>
+      <p:sp>
+        <p:nvSpPr>
+          <p:cNvPr id="3" name="Text Placeholder 2"/>
+          <p:cNvSpPr>
+            <a:spLocks noGrp="1"/>
+          </p:cNvSpPr>
+          <p:nvPr>
+            <p:ph type="body" idx="101"/>
+          </p:nvPr>
+        </p:nvSpPr>
+        <p:spPr/>
+        <p:txBody>
+          <a:bodyPr/>
+          <a:lstStyle/>
+          <a:p>
+            <a:r>
+              <a:t>1. 도입과 학습 목표</a:t>
             </a:r>
           </a:p>
         </p:txBody>
@@ -8161,40 +8362,415 @@
           <a:bodyPr/>
           <a:lstStyle/>
           <a:p>
-            <a:pPr>
-              <a:spcAft>
-                <a:spcPts val="1000"/>
-              </a:spcAft>
-            </a:pPr>
-            <a:r>
-              <a:rPr>
+            <a:pPr/>
+            <a:r>
+              <a:t>저장소: github.com/jihoyeo/mobility-simulation-book — blob/main 아래 경로</a:t>
+            </a:r>
+          </a:p>
+          <a:p>
+            <a:pPr/>
+            <a:r>
+              <a:t>노트북 실행: jupyter lab labs/ch11_simloop.ipynb</a:t>
+            </a:r>
+          </a:p>
+          <a:p>
+            <a:pPr/>
+            <a:r>
+              <a:t>진행 순서: 슬라이드 개요 → 교재 본문 → 실습 노트북</a:t>
+            </a:r>
+          </a:p>
+          <a:p>
+            <a:pPr/>
+            <a:r>
+              <a:t>자가 채점: python labs/check.py ch11</a:t>
+            </a:r>
+          </a:p>
+        </p:txBody>
+      </p:sp>
+      <p:sp>
+        <p:nvSpPr>
+          <p:cNvPr id="5" name="Text Placeholder 4"/>
+          <p:cNvSpPr>
+            <a:spLocks noGrp="1"/>
+          </p:cNvSpPr>
+          <p:nvPr>
+            <p:ph type="body" idx="103"/>
+          </p:nvPr>
+        </p:nvSpPr>
+        <p:spPr/>
+        <p:txBody>
+          <a:bodyPr/>
+          <a:lstStyle/>
+          <a:p>
+            <a:r>
+              <a:t>표 1. 오늘 여는 파일과 경로</a:t>
+            </a:r>
+          </a:p>
+        </p:txBody>
+      </p:sp>
+      <p:graphicFrame>
+        <p:nvGraphicFramePr>
+          <p:cNvPr id="6" name="Table Placeholder 5"/>
+          <p:cNvGraphicFramePr>
+            <a:graphicFrameLocks noGrp="1"/>
+          </p:cNvGraphicFramePr>
+          <p:nvPr>
+            <p:ph type="tbl" idx="104"/>
+          </p:nvPr>
+        </p:nvGraphicFramePr>
+        <p:xfrm>
+          <a:off x="4937760" y="1828800"/>
+          <a:ext cx="6565392" cy="2311400"/>
+        </p:xfrm>
+        <a:graphic>
+          <a:graphicData uri="http://schemas.openxmlformats.org/drawingml/2006/table">
+            <a:tbl>
+              <a:tblPr firstRow="0" bandRow="0" firstCol="0" lastRow="0" lastCol="0" bandCol="0"/>
+              <a:tblGrid>
+                <a:gridCol w="3282696"/>
+                <a:gridCol w="3282696"/>
+              </a:tblGrid>
+              <a:tr h="406400">
+                <a:tc>
+                  <a:txBody>
+                    <a:bodyPr/>
+                    <a:lstStyle/>
+                    <a:p>
+                      <a:r>
+                        <a:rPr sz="1300" b="0">
+                          <a:solidFill>
+                            <a:srgbClr val="FFFFFF"/>
+                          </a:solidFill>
+                          <a:latin typeface="Pretendard Medium"/>
+                        </a:rPr>
+                        <a:t>자료</a:t>
+                      </a:r>
+                    </a:p>
+                  </a:txBody>
+                  <a:tcPr marL="101600" marR="101600" marT="76200" marB="76200" anchor="ctr">
+                    <a:solidFill>
+                      <a:srgbClr val="000000"/>
+                    </a:solidFill>
+                    <a:lnL w="0">
+                      <a:noFill/>
+                    </a:lnL>
+                    <a:lnR w="0">
+                      <a:noFill/>
+                    </a:lnR>
+                    <a:lnT w="0">
+                      <a:noFill/>
+                    </a:lnT>
+                    <a:lnB w="0">
+                      <a:noFill/>
+                    </a:lnB>
+                  </a:tcPr>
+                </a:tc>
+                <a:tc>
+                  <a:txBody>
+                    <a:bodyPr/>
+                    <a:lstStyle/>
+                    <a:p>
+                      <a:r>
+                        <a:rPr sz="1300" b="0">
+                          <a:solidFill>
+                            <a:srgbClr val="FFFFFF"/>
+                          </a:solidFill>
+                          <a:latin typeface="Pretendard Medium"/>
+                        </a:rPr>
+                        <a:t>경로</a:t>
+                      </a:r>
+                    </a:p>
+                  </a:txBody>
+                  <a:tcPr marL="101600" marR="101600" marT="76200" marB="76200" anchor="ctr">
+                    <a:solidFill>
+                      <a:srgbClr val="000000"/>
+                    </a:solidFill>
+                    <a:lnL w="0">
+                      <a:noFill/>
+                    </a:lnL>
+                    <a:lnR w="0">
+                      <a:noFill/>
+                    </a:lnR>
+                    <a:lnT w="0">
+                      <a:noFill/>
+                    </a:lnT>
+                    <a:lnB w="0">
+                      <a:noFill/>
+                    </a:lnB>
+                  </a:tcPr>
+                </a:tc>
+              </a:tr>
+              <a:tr h="635000">
+                <a:tc>
+                  <a:txBody>
+                    <a:bodyPr/>
+                    <a:lstStyle/>
+                    <a:p>
+                      <a:r>
+                        <a:rPr sz="1300" b="1">
+                          <a:solidFill>
+                            <a:srgbClr val="000000"/>
+                          </a:solidFill>
+                          <a:latin typeface="Pretendard"/>
+                        </a:rPr>
+                        <a:t>교재 원고</a:t>
+                      </a:r>
+                    </a:p>
+                  </a:txBody>
+                  <a:tcPr marL="101600" marR="101600" marT="101600" marB="101600" anchor="ctr">
+                    <a:solidFill>
+                      <a:srgbClr val="FFFFFF"/>
+                    </a:solidFill>
+                    <a:lnL w="0">
+                      <a:noFill/>
+                    </a:lnL>
+                    <a:lnR w="0">
+                      <a:noFill/>
+                    </a:lnR>
+                    <a:lnT w="0">
+                      <a:noFill/>
+                    </a:lnT>
+                    <a:lnB w="9525">
+                      <a:solidFill>
+                        <a:srgbClr val="E2E2E2"/>
+                      </a:solidFill>
+                    </a:lnB>
+                  </a:tcPr>
+                </a:tc>
+                <a:tc>
+                  <a:txBody>
+                    <a:bodyPr/>
+                    <a:lstStyle/>
+                    <a:p>
+                      <a:r>
+                        <a:rPr sz="1300" b="0">
+                          <a:solidFill>
+                            <a:srgbClr val="5E5E5E"/>
+                          </a:solidFill>
+                          <a:latin typeface="Pretendard Medium"/>
+                        </a:rPr>
+                        <a:t>ko/ch11_simloop.md</a:t>
+                      </a:r>
+                    </a:p>
+                  </a:txBody>
+                  <a:tcPr marL="101600" marR="101600" marT="101600" marB="101600" anchor="ctr">
+                    <a:solidFill>
+                      <a:srgbClr val="FFFFFF"/>
+                    </a:solidFill>
+                    <a:lnL w="0">
+                      <a:noFill/>
+                    </a:lnL>
+                    <a:lnR w="0">
+                      <a:noFill/>
+                    </a:lnR>
+                    <a:lnT w="0">
+                      <a:noFill/>
+                    </a:lnT>
+                    <a:lnB w="9525">
+                      <a:solidFill>
+                        <a:srgbClr val="E2E2E2"/>
+                      </a:solidFill>
+                    </a:lnB>
+                  </a:tcPr>
+                </a:tc>
+              </a:tr>
+              <a:tr h="635000">
+                <a:tc>
+                  <a:txBody>
+                    <a:bodyPr/>
+                    <a:lstStyle/>
+                    <a:p>
+                      <a:r>
+                        <a:rPr sz="1300" b="1">
+                          <a:solidFill>
+                            <a:srgbClr val="000000"/>
+                          </a:solidFill>
+                          <a:latin typeface="Pretendard"/>
+                        </a:rPr>
+                        <a:t>실습 노트북</a:t>
+                      </a:r>
+                    </a:p>
+                  </a:txBody>
+                  <a:tcPr marL="101600" marR="101600" marT="101600" marB="101600" anchor="ctr">
+                    <a:solidFill>
+                      <a:srgbClr val="FFFFFF"/>
+                    </a:solidFill>
+                    <a:lnL w="0">
+                      <a:noFill/>
+                    </a:lnL>
+                    <a:lnR w="0">
+                      <a:noFill/>
+                    </a:lnR>
+                    <a:lnT w="0">
+                      <a:noFill/>
+                    </a:lnT>
+                    <a:lnB w="9525">
+                      <a:solidFill>
+                        <a:srgbClr val="E2E2E2"/>
+                      </a:solidFill>
+                    </a:lnB>
+                  </a:tcPr>
+                </a:tc>
+                <a:tc>
+                  <a:txBody>
+                    <a:bodyPr/>
+                    <a:lstStyle/>
+                    <a:p>
+                      <a:r>
+                        <a:rPr sz="1300" b="0">
+                          <a:solidFill>
+                            <a:srgbClr val="5E5E5E"/>
+                          </a:solidFill>
+                          <a:latin typeface="Pretendard Medium"/>
+                        </a:rPr>
+                        <a:t>labs/ch11_simloop.ipynb</a:t>
+                      </a:r>
+                    </a:p>
+                  </a:txBody>
+                  <a:tcPr marL="101600" marR="101600" marT="101600" marB="101600" anchor="ctr">
+                    <a:solidFill>
+                      <a:srgbClr val="FFFFFF"/>
+                    </a:solidFill>
+                    <a:lnL w="0">
+                      <a:noFill/>
+                    </a:lnL>
+                    <a:lnR w="0">
+                      <a:noFill/>
+                    </a:lnR>
+                    <a:lnT w="0">
+                      <a:noFill/>
+                    </a:lnT>
+                    <a:lnB w="9525">
+                      <a:solidFill>
+                        <a:srgbClr val="E2E2E2"/>
+                      </a:solidFill>
+                    </a:lnB>
+                  </a:tcPr>
+                </a:tc>
+              </a:tr>
+              <a:tr h="635000">
+                <a:tc>
+                  <a:txBody>
+                    <a:bodyPr/>
+                    <a:lstStyle/>
+                    <a:p>
+                      <a:r>
+                        <a:rPr sz="1300" b="1">
+                          <a:solidFill>
+                            <a:srgbClr val="000000"/>
+                          </a:solidFill>
+                          <a:latin typeface="Pretendard"/>
+                        </a:rPr>
+                        <a:t>채점 파일</a:t>
+                      </a:r>
+                    </a:p>
+                  </a:txBody>
+                  <a:tcPr marL="101600" marR="101600" marT="101600" marB="101600" anchor="ctr">
+                    <a:solidFill>
+                      <a:srgbClr val="FFFFFF"/>
+                    </a:solidFill>
+                    <a:lnL w="0">
+                      <a:noFill/>
+                    </a:lnL>
+                    <a:lnR w="0">
+                      <a:noFill/>
+                    </a:lnR>
+                    <a:lnT w="0">
+                      <a:noFill/>
+                    </a:lnT>
+                    <a:lnB w="9525">
+                      <a:solidFill>
+                        <a:srgbClr val="E2E2E2"/>
+                      </a:solidFill>
+                    </a:lnB>
+                  </a:tcPr>
+                </a:tc>
+                <a:tc>
+                  <a:txBody>
+                    <a:bodyPr/>
+                    <a:lstStyle/>
+                    <a:p>
+                      <a:r>
+                        <a:rPr sz="1300" b="0">
+                          <a:solidFill>
+                            <a:srgbClr val="5E5E5E"/>
+                          </a:solidFill>
+                          <a:latin typeface="Pretendard Medium"/>
+                        </a:rPr>
+                        <a:t>labs/ch11_simloop.py</a:t>
+                      </a:r>
+                    </a:p>
+                  </a:txBody>
+                  <a:tcPr marL="101600" marR="101600" marT="101600" marB="101600" anchor="ctr">
+                    <a:solidFill>
+                      <a:srgbClr val="FFFFFF"/>
+                    </a:solidFill>
+                    <a:lnL w="0">
+                      <a:noFill/>
+                    </a:lnL>
+                    <a:lnR w="0">
+                      <a:noFill/>
+                    </a:lnR>
+                    <a:lnT w="0">
+                      <a:noFill/>
+                    </a:lnT>
+                    <a:lnB w="9525">
+                      <a:solidFill>
+                        <a:srgbClr val="E2E2E2"/>
+                      </a:solidFill>
+                    </a:lnB>
+                  </a:tcPr>
+                </a:tc>
+              </a:tr>
+            </a:tbl>
+          </a:graphicData>
+        </a:graphic>
+      </p:graphicFrame>
+      <p:sp>
+        <p:nvSpPr>
+          <p:cNvPr id="25" name="Slide Number Placeholder 0"/>
+          <p:cNvSpPr>
+            <a:spLocks noGrp="1"/>
+          </p:cNvSpPr>
+          <p:nvPr>
+            <p:ph type="sldNum" sz="quarter" idx="4294967295"/>
+          </p:nvPr>
+        </p:nvSpPr>
+        <p:spPr>
+          <a:xfrm>
+            <a:off x="10591495" y="6355080"/>
+            <a:ext cx="914400" cy="274320"/>
+          </a:xfrm>
+          <a:prstGeom prst="rect">
+            <a:avLst/>
+          </a:prstGeom>
+          <a:extLst>
+            <a:ext uri="{C572A759-6A51-4108-AA02-DFA0A04FC94B}">
+              <ma14:wrappingTextBoxFlag xmlns:ma14="http://schemas.microsoft.com/office/mac/drawingml/2011/main" val="0"/>
+            </a:ext>
+          </a:extLst>
+        </p:spPr>
+        <p:txBody>
+          <a:bodyPr/>
+          <a:lstStyle>
+            <a:lvl1pPr>
+              <a:defRPr sz="1000">
                 <a:solidFill>
                   <a:srgbClr val="AFAFAF"/>
                 </a:solidFill>
-              </a:rPr>
-              <a:t>2.1  </a:t>
-            </a:r>
-            <a:r>
-              <a:t>한 스텝의 다섯 단계</a:t>
-            </a:r>
-          </a:p>
-          <a:p>
-            <a:pPr>
-              <a:spcAft>
-                <a:spcPts val="1000"/>
-              </a:spcAft>
-            </a:pPr>
-            <a:r>
-              <a:rPr>
-                <a:solidFill>
-                  <a:srgbClr val="AFAFAF"/>
-                </a:solidFill>
-              </a:rPr>
-              <a:t>2.2  </a:t>
-            </a:r>
-            <a:r>
-              <a:t>상태는 값 두 개면 충분</a:t>
-            </a:r>
+                <a:latin typeface="Pretendard Medium"/>
+                <a:ea typeface="Pretendard Medium"/>
+                <a:cs typeface="Pretendard Medium"/>
+              </a:defRPr>
+            </a:lvl1pPr>
+          </a:lstStyle>
+          <a:p>
+            <a:pPr algn="r"/>
+            <a:fld id="{F7021451-1387-4CA6-816F-3879F97B5CBC}" type="slidenum">
+              <a:rPr b="0" lang="en-US"/>
+              <a:t>1008</a:t>
+            </a:fld>
+            <a:endParaRPr lang="en-US"/>
           </a:p>
         </p:txBody>
       </p:sp>
@@ -8218,42 +8794,42 @@
       <p:grpSpPr/>
       <p:sp>
         <p:nvSpPr>
-          <p:cNvPr id="2" name="Title 1"/>
-          <p:cNvSpPr>
-            <a:spLocks noGrp="1"/>
-          </p:cNvSpPr>
-          <p:nvPr>
-            <p:ph type="title" idx="100"/>
-          </p:nvPr>
-        </p:nvSpPr>
-        <p:spPr/>
-        <p:txBody>
-          <a:bodyPr/>
-          <a:lstStyle/>
-          <a:p>
-            <a:r>
-              <a:t>2.1 한 스텝의 다섯 단계</a:t>
-            </a:r>
-          </a:p>
-        </p:txBody>
-      </p:sp>
-      <p:sp>
-        <p:nvSpPr>
-          <p:cNvPr id="3" name="Text Placeholder 2"/>
-          <p:cNvSpPr>
-            <a:spLocks noGrp="1"/>
-          </p:cNvSpPr>
-          <p:nvPr>
-            <p:ph type="body" idx="101"/>
-          </p:nvPr>
-        </p:nvSpPr>
-        <p:spPr/>
-        <p:txBody>
-          <a:bodyPr/>
-          <a:lstStyle/>
-          <a:p>
-            <a:r>
-              <a:t>2. 교재 11.1–11.2 스텝과 상태</a:t>
+          <p:cNvPr id="2" name="Text Placeholder 1"/>
+          <p:cNvSpPr>
+            <a:spLocks noGrp="1"/>
+          </p:cNvSpPr>
+          <p:nvPr>
+            <p:ph type="body" idx="100"/>
+          </p:nvPr>
+        </p:nvSpPr>
+        <p:spPr/>
+        <p:txBody>
+          <a:bodyPr/>
+          <a:lstStyle/>
+          <a:p>
+            <a:r>
+              <a:t>02</a:t>
+            </a:r>
+          </a:p>
+        </p:txBody>
+      </p:sp>
+      <p:sp>
+        <p:nvSpPr>
+          <p:cNvPr id="3" name="Title 2"/>
+          <p:cNvSpPr>
+            <a:spLocks noGrp="1"/>
+          </p:cNvSpPr>
+          <p:nvPr>
+            <p:ph type="title" idx="101"/>
+          </p:nvPr>
+        </p:nvSpPr>
+        <p:spPr/>
+        <p:txBody>
+          <a:bodyPr/>
+          <a:lstStyle/>
+          <a:p>
+            <a:r>
+              <a:t>교재 11.1–11.2 스텝과 상태</a:t>
             </a:r>
           </a:p>
         </p:txBody>
@@ -8273,94 +8849,40 @@
           <a:bodyPr/>
           <a:lstStyle/>
           <a:p>
-            <a:pPr/>
-            <a:r>
-              <a:t>접수와 포기 처리</a:t>
-            </a:r>
-          </a:p>
-          <a:p>
-            <a:pPr lvl="1"/>
-            <a:r>
-              <a:t>1단계: 이번 분에 들어온 호출을 대기 목록에 추가</a:t>
-            </a:r>
-          </a:p>
-          <a:p>
-            <a:pPr lvl="1"/>
-            <a:r>
-              <a:t>2단계: 기준 시간을 초과해 기다린 호출을 포기 처리</a:t>
-            </a:r>
-          </a:p>
-          <a:p>
-            <a:pPr/>
-            <a:r>
-              <a:t>3단계: 대기 승객과 빈 차가 모두 있으면 배차 — 10장에서 만든 부분</a:t>
-            </a:r>
-          </a:p>
-          <a:p>
-            <a:pPr/>
-            <a:r>
-              <a:t>갱신과 기록</a:t>
-            </a:r>
-          </a:p>
-          <a:p>
-            <a:pPr lvl="1"/>
-            <a:r>
-              <a:t>4단계: 배차된 차량의 다음 가용 시각 계산</a:t>
-            </a:r>
-          </a:p>
-          <a:p>
-            <a:pPr lvl="1"/>
-            <a:r>
-              <a:t>5단계: 이번 분의 상태 기록</a:t>
-            </a:r>
-          </a:p>
-        </p:txBody>
-      </p:sp>
-      <p:sp>
-        <p:nvSpPr>
-          <p:cNvPr id="25" name="Slide Number Placeholder 0"/>
-          <p:cNvSpPr>
-            <a:spLocks noGrp="1"/>
-          </p:cNvSpPr>
-          <p:nvPr>
-            <p:ph type="sldNum" sz="quarter" idx="4294967295"/>
-          </p:nvPr>
-        </p:nvSpPr>
-        <p:spPr>
-          <a:xfrm>
-            <a:off x="10591495" y="6355080"/>
-            <a:ext cx="914400" cy="274320"/>
-          </a:xfrm>
-          <a:prstGeom prst="rect">
-            <a:avLst/>
-          </a:prstGeom>
-          <a:extLst>
-            <a:ext uri="{C572A759-6A51-4108-AA02-DFA0A04FC94B}">
-              <ma14:wrappingTextBoxFlag xmlns:ma14="http://schemas.microsoft.com/office/mac/drawingml/2011/main" val="0"/>
-            </a:ext>
-          </a:extLst>
-        </p:spPr>
-        <p:txBody>
-          <a:bodyPr/>
-          <a:lstStyle>
-            <a:lvl1pPr>
-              <a:defRPr sz="1000">
+            <a:pPr>
+              <a:spcAft>
+                <a:spcPts val="1000"/>
+              </a:spcAft>
+            </a:pPr>
+            <a:r>
+              <a:rPr>
                 <a:solidFill>
                   <a:srgbClr val="AFAFAF"/>
                 </a:solidFill>
-                <a:latin typeface="Pretendard Medium"/>
-                <a:ea typeface="Pretendard Medium"/>
-                <a:cs typeface="Pretendard Medium"/>
-              </a:defRPr>
-            </a:lvl1pPr>
-          </a:lstStyle>
-          <a:p>
-            <a:pPr algn="r"/>
-            <a:fld id="{F7021451-1387-4CA6-816F-3879F97B5CBC}" type="slidenum">
-              <a:rPr b="0" lang="en-US"/>
-              <a:t>1004</a:t>
-            </a:fld>
-            <a:endParaRPr lang="en-US"/>
+              </a:rPr>
+              <a:t>2.1  </a:t>
+            </a:r>
+            <a:r>
+              <a:t>한 스텝의 다섯 단계</a:t>
+            </a:r>
+          </a:p>
+          <a:p>
+            <a:pPr>
+              <a:spcAft>
+                <a:spcPts val="1000"/>
+              </a:spcAft>
+            </a:pPr>
+            <a:r>
+              <a:rPr>
+                <a:solidFill>
+                  <a:srgbClr val="AFAFAF"/>
+                </a:solidFill>
+              </a:rPr>
+              <a:t>2.2  </a:t>
+            </a:r>
+            <a:r>
+              <a:t>상태는 값 두 개면 충분</a:t>
+            </a:r>
           </a:p>
         </p:txBody>
       </p:sp>
@@ -8398,7 +8920,7 @@
           <a:lstStyle/>
           <a:p>
             <a:r>
-              <a:t>2.2 상태는 값 두 개면 충분</a:t>
+              <a:t>2.1 한 스텝의 다섯 단계</a:t>
             </a:r>
           </a:p>
         </p:txBody>
@@ -8441,25 +8963,43 @@
           <a:p>
             <a:pPr/>
             <a:r>
-              <a:t>차량 상태를 대기, 픽업 이동, 승객 탑승의 세 가지로 열거하고 싶어지는 상황</a:t>
+              <a:t>접수와 포기 처리</a:t>
+            </a:r>
+          </a:p>
+          <a:p>
+            <a:pPr lvl="1"/>
+            <a:r>
+              <a:t>1단계: 이번 분에 들어온 호출을 대기 목록에 추가</a:t>
+            </a:r>
+          </a:p>
+          <a:p>
+            <a:pPr lvl="1"/>
+            <a:r>
+              <a:t>2단계: 기준 시간을 초과해 기다린 호출을 포기 처리</a:t>
             </a:r>
           </a:p>
           <a:p>
             <a:pPr/>
             <a:r>
-              <a:t>실제로 필요한 것: 현재 위치와 다시 가용해지는 시각</a:t>
+              <a:t>3단계: 대기 승객과 빈 차가 모두 있으면 배차 — 10장에서 만든 부분</a:t>
             </a:r>
           </a:p>
           <a:p>
             <a:pPr/>
             <a:r>
-              <a:t>가용 시각 하나로 운행 중과 대기 중이 모두 표현됨</a:t>
-            </a:r>
-          </a:p>
-          <a:p>
-            <a:pPr/>
-            <a:r>
-              <a:t>상태 변수를 따로 두면 상태와 시각이 어긋나는 오류가 발생</a:t>
+              <a:t>갱신과 기록</a:t>
+            </a:r>
+          </a:p>
+          <a:p>
+            <a:pPr lvl="1"/>
+            <a:r>
+              <a:t>4단계: 배차된 차량의 다음 가용 시각 계산</a:t>
+            </a:r>
+          </a:p>
+          <a:p>
+            <a:pPr lvl="1"/>
+            <a:r>
+              <a:t>5단계: 이번 분의 상태 기록</a:t>
             </a:r>
           </a:p>
         </p:txBody>
@@ -8532,42 +9072,42 @@
       <p:grpSpPr/>
       <p:sp>
         <p:nvSpPr>
-          <p:cNvPr id="2" name="Text Placeholder 1"/>
-          <p:cNvSpPr>
-            <a:spLocks noGrp="1"/>
-          </p:cNvSpPr>
-          <p:nvPr>
-            <p:ph type="body" idx="100"/>
-          </p:nvPr>
-        </p:nvSpPr>
-        <p:spPr/>
-        <p:txBody>
-          <a:bodyPr/>
-          <a:lstStyle/>
-          <a:p>
-            <a:r>
-              <a:t>03</a:t>
-            </a:r>
-          </a:p>
-        </p:txBody>
-      </p:sp>
-      <p:sp>
-        <p:nvSpPr>
-          <p:cNvPr id="3" name="Title 2"/>
-          <p:cNvSpPr>
-            <a:spLocks noGrp="1"/>
-          </p:cNvSpPr>
-          <p:nvPr>
-            <p:ph type="title" idx="101"/>
-          </p:nvPr>
-        </p:nvSpPr>
-        <p:spPr/>
-        <p:txBody>
-          <a:bodyPr/>
-          <a:lstStyle/>
-          <a:p>
-            <a:r>
-              <a:t>교재 11.3–11.4 루프와 실행</a:t>
+          <p:cNvPr id="2" name="Title 1"/>
+          <p:cNvSpPr>
+            <a:spLocks noGrp="1"/>
+          </p:cNvSpPr>
+          <p:nvPr>
+            <p:ph type="title" idx="100"/>
+          </p:nvPr>
+        </p:nvSpPr>
+        <p:spPr/>
+        <p:txBody>
+          <a:bodyPr/>
+          <a:lstStyle/>
+          <a:p>
+            <a:r>
+              <a:t>2.2 상태는 값 두 개면 충분</a:t>
+            </a:r>
+          </a:p>
+        </p:txBody>
+      </p:sp>
+      <p:sp>
+        <p:nvSpPr>
+          <p:cNvPr id="3" name="Text Placeholder 2"/>
+          <p:cNvSpPr>
+            <a:spLocks noGrp="1"/>
+          </p:cNvSpPr>
+          <p:nvPr>
+            <p:ph type="body" idx="101"/>
+          </p:nvPr>
+        </p:nvSpPr>
+        <p:spPr/>
+        <p:txBody>
+          <a:bodyPr/>
+          <a:lstStyle/>
+          <a:p>
+            <a:r>
+              <a:t>2. 교재 11.1–11.2 스텝과 상태</a:t>
             </a:r>
           </a:p>
         </p:txBody>
@@ -8587,40 +9127,76 @@
           <a:bodyPr/>
           <a:lstStyle/>
           <a:p>
-            <a:pPr>
-              <a:spcAft>
-                <a:spcPts val="1000"/>
-              </a:spcAft>
-            </a:pPr>
-            <a:r>
-              <a:rPr>
+            <a:pPr/>
+            <a:r>
+              <a:t>차량 상태를 대기, 픽업 이동, 승객 탑승의 세 가지로 열거하고 싶어지는 상황</a:t>
+            </a:r>
+          </a:p>
+          <a:p>
+            <a:pPr/>
+            <a:r>
+              <a:t>실제로 필요한 것: 현재 위치와 다시 가용해지는 시각</a:t>
+            </a:r>
+          </a:p>
+          <a:p>
+            <a:pPr/>
+            <a:r>
+              <a:t>가용 시각 하나로 운행 중과 대기 중이 모두 표현됨</a:t>
+            </a:r>
+          </a:p>
+          <a:p>
+            <a:pPr/>
+            <a:r>
+              <a:t>상태 변수를 따로 두면 상태와 시각이 어긋나는 오류가 발생</a:t>
+            </a:r>
+          </a:p>
+        </p:txBody>
+      </p:sp>
+      <p:sp>
+        <p:nvSpPr>
+          <p:cNvPr id="25" name="Slide Number Placeholder 0"/>
+          <p:cNvSpPr>
+            <a:spLocks noGrp="1"/>
+          </p:cNvSpPr>
+          <p:nvPr>
+            <p:ph type="sldNum" sz="quarter" idx="4294967295"/>
+          </p:nvPr>
+        </p:nvSpPr>
+        <p:spPr>
+          <a:xfrm>
+            <a:off x="10591495" y="6355080"/>
+            <a:ext cx="914400" cy="274320"/>
+          </a:xfrm>
+          <a:prstGeom prst="rect">
+            <a:avLst/>
+          </a:prstGeom>
+          <a:extLst>
+            <a:ext uri="{C572A759-6A51-4108-AA02-DFA0A04FC94B}">
+              <ma14:wrappingTextBoxFlag xmlns:ma14="http://schemas.microsoft.com/office/mac/drawingml/2011/main" val="0"/>
+            </a:ext>
+          </a:extLst>
+        </p:spPr>
+        <p:txBody>
+          <a:bodyPr/>
+          <a:lstStyle>
+            <a:lvl1pPr>
+              <a:defRPr sz="1000">
                 <a:solidFill>
                   <a:srgbClr val="AFAFAF"/>
                 </a:solidFill>
-              </a:rPr>
-              <a:t>3.1  </a:t>
-            </a:r>
-            <a:r>
-              <a:t>배차 이후의 처리</a:t>
-            </a:r>
-          </a:p>
-          <a:p>
-            <a:pPr>
-              <a:spcAft>
-                <a:spcPts val="1000"/>
-              </a:spcAft>
-            </a:pPr>
-            <a:r>
-              <a:rPr>
-                <a:solidFill>
-                  <a:srgbClr val="AFAFAF"/>
-                </a:solidFill>
-              </a:rPr>
-              <a:t>3.2  </a:t>
-            </a:r>
-            <a:r>
-              <a:t>실행 결과</a:t>
-            </a:r>
+                <a:latin typeface="Pretendard Medium"/>
+                <a:ea typeface="Pretendard Medium"/>
+                <a:cs typeface="Pretendard Medium"/>
+              </a:defRPr>
+            </a:lvl1pPr>
+          </a:lstStyle>
+          <a:p>
+            <a:pPr algn="r"/>
+            <a:fld id="{F7021451-1387-4CA6-816F-3879F97B5CBC}" type="slidenum">
+              <a:rPr b="0" lang="en-US"/>
+              <a:t>1004</a:t>
+            </a:fld>
+            <a:endParaRPr lang="en-US"/>
           </a:p>
         </p:txBody>
       </p:sp>
